--- a/Quantum-Assisted Disaster Response Optimization.pptx
+++ b/Quantum-Assisted Disaster Response Optimization.pptx
@@ -4,6 +4,9 @@
   <p:sldMasterIdLst>
     <p:sldMasterId id="2147483648" r:id="rId1"/>
   </p:sldMasterIdLst>
+  <p:notesMasterIdLst>
+    <p:notesMasterId r:id="rId17"/>
+  </p:notesMasterIdLst>
   <p:sldIdLst>
     <p:sldId id="256" r:id="rId2"/>
     <p:sldId id="257" r:id="rId3"/>
@@ -21,9 +24,6 @@
     <p:sldId id="269" r:id="rId15"/>
     <p:sldId id="270" r:id="rId16"/>
   </p:sldIdLst>
-  <p:notesMasterIdLst>
-    <p:notesMasterId r:id="rId17"/>
-  </p:notesMasterIdLst>
   <p:sldSz cx="12192000" cy="6858000"/>
   <p:notesSz cx="6858000" cy="12192000"/>
   <p:defaultTextStyle>
@@ -118,6 +118,11 @@
       </a:defRPr>
     </a:lvl9pPr>
   </p:defaultTextStyle>
+  <p:extLst>
+    <p:ext uri="{EFAFB233-063F-42B5-8137-9DF3F51BA10A}">
+      <p15:sldGuideLst xmlns:p15="http://schemas.microsoft.com/office/powerpoint/2012/main"/>
+    </p:ext>
+  </p:extLst>
 </p:presentation>
 </file>
 
@@ -143,234 +148,10 @@
           <a:chExt cx="0" cy="0"/>
         </a:xfrm>
       </p:grpSpPr>
-      <p:sp>
-        <p:nvSpPr>
-          <p:cNvPr id="2" name="Header Placeholder 1"/>
-          <p:cNvSpPr>
-            <a:spLocks noGrp="1"/>
-          </p:cNvSpPr>
-          <p:nvPr>
-            <p:ph type="hdr" sz="quarter"/>
-          </p:nvPr>
-        </p:nvSpPr>
-        <p:spPr>
-          <a:xfrm>
-            <a:off x="0" y="0"/>
-            <a:ext cx="2971800" cy="458788"/>
-          </a:xfrm>
-          <a:prstGeom prst="rect">
-            <a:avLst/>
-          </a:prstGeom>
-        </p:spPr>
-        <p:txBody>
-          <a:bodyPr vert="horz" lIns="91440" tIns="45720" rIns="91440" bIns="45720" rtlCol="0"/>
-          <a:lstStyle>
-            <a:lvl1pPr algn="l">
-              <a:defRPr sz="1200"/>
-            </a:lvl1pPr>
-          </a:lstStyle>
-          <a:p>
-            <a:endParaRPr lang="en-US"/>
-          </a:p>
-        </p:txBody>
-      </p:sp>
-      <p:sp>
-        <p:nvSpPr>
-          <p:cNvPr id="3" name="Date Placeholder 2"/>
-          <p:cNvSpPr>
-            <a:spLocks noGrp="1"/>
-          </p:cNvSpPr>
-          <p:nvPr>
-            <p:ph type="dt" idx="1"/>
-          </p:nvPr>
-        </p:nvSpPr>
-        <p:spPr>
-          <a:xfrm>
-            <a:off x="3884613" y="0"/>
-            <a:ext cx="2971800" cy="458788"/>
-          </a:xfrm>
-          <a:prstGeom prst="rect">
-            <a:avLst/>
-          </a:prstGeom>
-        </p:spPr>
-        <p:txBody>
-          <a:bodyPr vert="horz" lIns="91440" tIns="45720" rIns="91440" bIns="45720" rtlCol="0"/>
-          <a:lstStyle>
-            <a:lvl1pPr algn="r">
-              <a:defRPr sz="1200"/>
-            </a:lvl1pPr>
-          </a:lstStyle>
-          <a:p>
-            <a:fld id="{5282F153-3F37-0F45-9E97-73ACFA13230C}" type="datetimeFigureOut">
-              <a:rPr lang="en-US"/>
-              <a:t>7/23/19</a:t>
-            </a:fld>
-            <a:endParaRPr lang="en-US"/>
-          </a:p>
-        </p:txBody>
-      </p:sp>
-      <p:sp>
-        <p:nvSpPr>
-          <p:cNvPr id="4" name="Slide Image Placeholder 3"/>
-          <p:cNvSpPr>
-            <a:spLocks noGrp="1" noRot="1" noChangeAspect="1"/>
-          </p:cNvSpPr>
-          <p:nvPr>
-            <p:ph type="sldImg" idx="2"/>
-          </p:nvPr>
-        </p:nvSpPr>
-        <p:spPr>
-          <a:xfrm>
-            <a:off x="685800" y="1143000"/>
-            <a:ext cx="5486400" cy="3086100"/>
-          </a:xfrm>
-          <a:prstGeom prst="rect">
-            <a:avLst/>
-          </a:prstGeom>
-          <a:noFill/>
-          <a:ln w="12700">
-            <a:solidFill>
-              <a:prstClr val="black"/>
-            </a:solidFill>
-          </a:ln>
-        </p:spPr>
-        <p:txBody>
-          <a:bodyPr vert="horz" lIns="91440" tIns="45720" rIns="91440" bIns="45720" rtlCol="0" anchor="ctr"/>
-          <a:lstStyle/>
-          <a:p>
-            <a:endParaRPr lang="en-US"/>
-          </a:p>
-        </p:txBody>
-      </p:sp>
-      <p:sp>
-        <p:nvSpPr>
-          <p:cNvPr id="5" name="Notes Placeholder 4"/>
-          <p:cNvSpPr>
-            <a:spLocks noGrp="1"/>
-          </p:cNvSpPr>
-          <p:nvPr>
-            <p:ph type="body" sz="quarter" idx="3"/>
-          </p:nvPr>
-        </p:nvSpPr>
-        <p:spPr>
-          <a:xfrm>
-            <a:off x="685800" y="4400550"/>
-            <a:ext cx="5486400" cy="3600450"/>
-          </a:xfrm>
-          <a:prstGeom prst="rect">
-            <a:avLst/>
-          </a:prstGeom>
-        </p:spPr>
-        <p:txBody>
-          <a:bodyPr vert="horz" lIns="91440" tIns="45720" rIns="91440" bIns="45720" rtlCol="0"/>
-          <a:lstStyle/>
-          <a:p>
-            <a:pPr lvl="0"/>
-            <a:r>
-              <a:rPr lang="en-US"/>
-              <a:t>Click to edit Master text styles</a:t>
-            </a:r>
-          </a:p>
-          <a:p>
-            <a:pPr lvl="1"/>
-            <a:r>
-              <a:rPr lang="en-US"/>
-              <a:t>Second level</a:t>
-            </a:r>
-          </a:p>
-          <a:p>
-            <a:pPr lvl="2"/>
-            <a:r>
-              <a:rPr lang="en-US"/>
-              <a:t>Third level</a:t>
-            </a:r>
-          </a:p>
-          <a:p>
-            <a:pPr lvl="3"/>
-            <a:r>
-              <a:rPr lang="en-US"/>
-              <a:t>Fourth level</a:t>
-            </a:r>
-          </a:p>
-          <a:p>
-            <a:pPr lvl="4"/>
-            <a:r>
-              <a:rPr lang="en-US"/>
-              <a:t>Fifth level</a:t>
-            </a:r>
-          </a:p>
-        </p:txBody>
-      </p:sp>
-      <p:sp>
-        <p:nvSpPr>
-          <p:cNvPr id="6" name="Footer Placeholder 5"/>
-          <p:cNvSpPr>
-            <a:spLocks noGrp="1"/>
-          </p:cNvSpPr>
-          <p:nvPr>
-            <p:ph type="ftr" sz="quarter" idx="4"/>
-          </p:nvPr>
-        </p:nvSpPr>
-        <p:spPr>
-          <a:xfrm>
-            <a:off x="0" y="8685213"/>
-            <a:ext cx="2971800" cy="458787"/>
-          </a:xfrm>
-          <a:prstGeom prst="rect">
-            <a:avLst/>
-          </a:prstGeom>
-        </p:spPr>
-        <p:txBody>
-          <a:bodyPr vert="horz" lIns="91440" tIns="45720" rIns="91440" bIns="45720" rtlCol="0" anchor="b"/>
-          <a:lstStyle>
-            <a:lvl1pPr algn="l">
-              <a:defRPr sz="1200"/>
-            </a:lvl1pPr>
-          </a:lstStyle>
-          <a:p>
-            <a:endParaRPr lang="en-US"/>
-          </a:p>
-        </p:txBody>
-      </p:sp>
-      <p:sp>
-        <p:nvSpPr>
-          <p:cNvPr id="7" name="Slide Number Placeholder 6"/>
-          <p:cNvSpPr>
-            <a:spLocks noGrp="1"/>
-          </p:cNvSpPr>
-          <p:nvPr>
-            <p:ph type="sldNum" sz="quarter" idx="5"/>
-          </p:nvPr>
-        </p:nvSpPr>
-        <p:spPr>
-          <a:xfrm>
-            <a:off x="3884613" y="8685213"/>
-            <a:ext cx="2971800" cy="458787"/>
-          </a:xfrm>
-          <a:prstGeom prst="rect">
-            <a:avLst/>
-          </a:prstGeom>
-        </p:spPr>
-        <p:txBody>
-          <a:bodyPr vert="horz" lIns="91440" tIns="45720" rIns="91440" bIns="45720" rtlCol="0" anchor="b"/>
-          <a:lstStyle>
-            <a:lvl1pPr algn="r">
-              <a:defRPr sz="1200"/>
-            </a:lvl1pPr>
-          </a:lstStyle>
-          <a:p>
-            <a:fld id="{CE5E9CC1-C706-0F49-92D6-E571CC5EEA8F}" type="slidenum">
-              <a:rPr lang="en-US"/>
-              <a:t>‹#›</a:t>
-            </a:fld>
-            <a:endParaRPr lang="en-US"/>
-          </a:p>
-        </p:txBody>
-      </p:sp>
     </p:spTree>
     <p:extLst>
       <p:ext uri="{BB962C8B-B14F-4D97-AF65-F5344CB8AC3E}">
-        <p14:creationId xmlns:p14="http://schemas.microsoft.com/office/powerpoint/2010/main" val="1024086991"/>
+        <p14:creationId xmlns:p14="http://schemas.microsoft.com/office/powerpoint/2010/main" val="469713155"/>
       </p:ext>
     </p:extLst>
   </p:cSld>
@@ -518,7 +299,6 @@
               <a:rPr lang="en-US" dirty="0"/>
               <a:t>Open on the map: the Krishna river at Vijayawada, which flooded in September 2024. Coloured cells are the flood-risk layer; orange circles are the six sites chosen by our QAOA pipeline in the benchmark. One-sentence pitch: classical ML says where the risk is, a hybrid quantum-classical optimiser decides where help goes, and the loop re-runs when conditions change. We address QAIC use case UC-067 (flood forecasting and disaster-response sensor placement) and extend to UC-077 (disaster resource and evacuation optimisation).</a:t>
             </a:r>
-            <a:endParaRPr lang="en-US" dirty="0"/>
           </a:p>
         </p:txBody>
       </p:sp>
@@ -606,7 +386,6 @@
               <a:rPr lang="en-US" dirty="0"/>
               <a:t>How the quantum stage runs. Qiskit converts the QUBO to an Ising operator and builds a QAOAAnsatz. We decompose the region into subproblems of at most about 20 logical problem qubits; in the benchmark they are 12 and 11. The reason: a July 2026 benchmark on IBM Heron found naive QAOA on larger instances transpiling to more than 20,000 two-qubit gates with results indistinguishable from random. Our own subproblem is dense, 66 ZZ terms per layer, because the cardinality penalty couples every pair, so routing on heavy-hex adds SWAPs; that is why size is set by fidelity, not by the 133 to 156 physical qubits on the chip. Circuits are transpiled at optimisation level 3, submitted through Qiskit Runtime Sampler V2 in batch mode, which the free Open Plan supports, with angles optimised on the simulator and transferred, 4,096 shots per subproblem, dynamical decoupling and gate twirling on. The same code targets the planned Amaravati IBM Quantum System Two environment.</a:t>
             </a:r>
-            <a:endParaRPr lang="en-US" dirty="0"/>
           </a:p>
         </p:txBody>
       </p:sp>
@@ -694,7 +473,6 @@
               <a:rPr lang="en-US" dirty="0"/>
               <a:t>This is our main innovation: a closed-loop quantum optimisation system that re-solves only the affected region when disaster conditions change. At T0 the forecast gives a baseline and we place six units. Six hours later the Budameru catchment surges, the risk layer shifts north, and units move toward it. By T plus 12 hours the water is in the delta and the plan follows. Three mechanisms keep QPU time small: an event trigger so we re-run only when inputs change; local re-solving so only affected subregions return to the hardware; and warm-starting from the previous QAOA angles. The three maps are the same pipeline applied to three risk states of our prototype risk layer.</a:t>
             </a:r>
-            <a:endParaRPr lang="en-US" dirty="0"/>
           </a:p>
         </p:txBody>
       </p:sp>
@@ -782,7 +560,6 @@
               <a:rPr lang="en-US" dirty="0"/>
               <a:t>The evidence slide. One synthetic instance on the Krishna-basin grid: 285 cells, 23 candidate sites, 6 units, 100,947 possible plans. Four methods on the same instance and the same objective, risk-weighted coverage. Uniform spacing, a static plan, covers 21.8%. Greedy covers 61.9%, which equals the exact optimum found by exhaustive search in 0.7 seconds. QAOA with p equal to 2, simulated ideally, decomposed into a 12-qubit and an 11-qubit subproblem, reaches 58.9%, an approximation ratio of 0.95. Inside each subproblem QAOA found the exact QUBO optimum, and it concentrated 41.8% and 45.8% of samples on feasible plans versus 5.4% and 8.1% for random sampling. So the remaining gap is from modelling choices, the second-order QUBO and the regional split, not from the quantum sampler. Greedy is already optimal here, so we claim no quantum advantage; the point is a validated, hardware-ready pipeline. The hardware step runs the same circuits on IBM Heron with run_ibm.py.</a:t>
             </a:r>
-            <a:endParaRPr lang="en-US" dirty="0"/>
           </a:p>
         </p:txBody>
       </p:sp>
@@ -870,7 +647,6 @@
               <a:rPr lang="en-US" dirty="0"/>
               <a:t>The screen the video walks through, filled with the benchmark run. Left: risk layer and the six sites QAOA chose. Right: the quantum job: two subproblems of 12 and 11 problem qubits, 4,096 shots each, 41.8 and 45.8 percent feasible samples, plan ready. The four steps at the bottom are the video script: load an event, score risk, solve, then inject a change and show the re-plan. When recording, show the IBM Quantum Platform job page next to the console so the job IDs are visible.</a:t>
             </a:r>
-            <a:endParaRPr lang="en-US" dirty="0"/>
           </a:p>
         </p:txBody>
       </p:sp>
@@ -958,7 +734,6 @@
               <a:rPr lang="en-US" dirty="0"/>
               <a:t>Positioning, stated plainly: we demonstrate a quantum-compatible, hardware-executed optimisation pipeline, not practical quantum advantage on today's small instances. What is new: the closed loop from ML risk to QUBO to QAOA with no manual step; event-triggered, warm-started, local re-solving; and decomposition sized to measured hardware fidelity. Fit: UC-067 directly, extending to UC-077; it builds on DST-NQM proposals 03 (quantum optimisation for mobility and logistics, IIT Hyderabad and IISER Tirupati) and 04 (QUEST climate modelling, with Andhra University); and it is designed for compatibility with the planned Amaravati IBM Quantum System Two environment. Limits: no advantage claimed; subproblems capped near 20 qubits by noise; classical solvers remain baseline and fallback. The buyer is the state disaster authority, funded through the 15th Finance Commission's 2.29 lakh crore disaster allocation.</a:t>
             </a:r>
-            <a:endParaRPr lang="en-US" dirty="0"/>
           </a:p>
         </p:txBody>
       </p:sp>
@@ -1046,7 +821,6 @@
               <a:rPr lang="en-US" dirty="0"/>
               <a:t>Close on the one-line idea: forecasts tell you where the water goes; our system decides where help goes, on quantum hardware, and keeps deciding as the situation changes. Point to the demo video and the repository, which includes the benchmark (qadr_bench.py) and the hardware runner (run_ibm.py). References are grouped: methods first, then platform, then problem data.</a:t>
             </a:r>
-            <a:endParaRPr lang="en-US" dirty="0"/>
           </a:p>
         </p:txBody>
       </p:sp>
@@ -1134,7 +908,6 @@
               <a:rPr lang="en-US" dirty="0"/>
               <a:t>Two events, fourteen months apart, same coast. Vijayawada, September 2024: 6.44 lakh people affected, 193 relief camps, more than 42,000 people moved to shelters, 26 NDRF and 22 SDRF teams deployed (state disaster-management figures as reported by National Herald). The Budameru rivulet carried an estimated 30,000 to 35,000 cusecs into a diversion canal built for about 7,500 (The South First, quoting irrigation experts). Cyclone Montha, October 2025: the state's revised loss estimate to the central team was 6,384 crore rupees across 24 districts (Deccan Herald); All India Radio reported 43,000 hectares of crops damaged initially and 12 NDRF teams positioned in Andhra. Every number here is a placement decision: where camps, teams, boats and sensors go.</a:t>
             </a:r>
-            <a:endParaRPr lang="en-US" dirty="0"/>
           </a:p>
         </p:txBody>
       </p:sp>
@@ -1222,7 +995,6 @@
               <a:rPr lang="en-US" dirty="0"/>
               <a:t>Placement is subset selection. With 60 candidate sites and 10 teams there are about 75 billion plans (exact binomial coefficient C(60,10)). Sites interact because coverage overlaps, so they cannot be scored independently, and the inputs change during the event. That is precisely the structure of a QUBO: one binary decision variable per site, pairwise terms for overlap, a penalty for the budget constraint. This is why we use quantum optimisation for placement, and classical ML for forecasting.</a:t>
             </a:r>
-            <a:endParaRPr lang="en-US" dirty="0"/>
           </a:p>
         </p:txBody>
       </p:sp>
@@ -1310,7 +1082,6 @@
               <a:rPr lang="en-US" dirty="0"/>
               <a:t>The research gap. Forecasting is crowded and good: Google Flood Hub's model (Nearing et al., Nature 2024), CWC and IMD. Their output is a risk prediction. What happens next is manual in control rooms, or at best a classical MILP solved offline and periodically. The closest quantum prior art is the UK NQCC SparQ project with Mind Foundry on quantum optimisation for disaster sensor networks, which addresses placement but not a live loop from forecast to plan. Our contribution is the chain on the right: risk prediction feeds automatic QUBO construction, QAOA samples placements on IBM hardware, constraints are validated, and the whole loop re-runs when events trigger it. We are explicit: the novelty is the closed-loop integration, not a claim of quantum advantage.</a:t>
             </a:r>
-            <a:endParaRPr lang="en-US" dirty="0"/>
           </a:p>
         </p:txBody>
       </p:sp>
@@ -1398,7 +1169,6 @@
               <a:rPr lang="en-US" dirty="0"/>
               <a:t>System architecture in four layers. Data sources: IMD rainfall grids, CWC river gauges, Sentinel-1 radar for past flood extents used as training labels, and SRTM terrain, OpenStreetMap roads and Census population. Classical services: an event trigger that fires on threshold crossings, the risk service, the QUBO builder that also decomposes the region, and a classical baseline solver. Quantum layer: Qiskit transpiles to ISA circuits for the heavy-hex lattice, Qiskit Runtime's Sampler V2 submits in batch mode, the IBM Heron QPU samples, and a decoder checks feasibility and repairs if needed. Delivery: a versioned plan store, the operator console, dispatch to field teams, and an audit log. Two engineering decisions researchers should note: the classical baseline is always computed and ships if the QPU cannot answer in time, and every plan is traceable to an IBM job ID.</a:t>
             </a:r>
-            <a:endParaRPr lang="en-US" dirty="0"/>
           </a:p>
         </p:txBody>
       </p:sp>
@@ -1486,7 +1256,6 @@
               <a:rPr lang="en-US" dirty="0"/>
               <a:t>The method as one line. 01: gridded disaster map from IMD rainfall, SRTM elevation and OpenStreetMap. 02: gradient-boosted risk model. 03: the placement decision becomes a QUBO, converted to an Ising Hamiltonian. 04: Qiskit builds the QAOA circuit with one or two layers. 05: the circuit runs on an IBM Heron QPU through Qiskit Runtime. 06: the best feasible bitstring decodes into a placement. 07: when inputs cross a threshold, the loop re-runs from the risk model. Only the three boxed stages are quantum; that split is deliberate.</a:t>
             </a:r>
-            <a:endParaRPr lang="en-US" dirty="0"/>
           </a:p>
         </p:txBody>
       </p:sp>
@@ -1574,7 +1343,6 @@
               <a:rPr lang="en-US" dirty="0"/>
               <a:t>Stage one is deliberately classical: gradient-boosted trees are strong on tabular geospatial data and fast to retrain. Features are IMD gridded rainfall, SRTM elevation, distance to river and land use; labels are flood extents mapped from Sentinel-1 radar for past events including September 2024; validation is spatial cross-validation so neighbouring cells do not leak. The only thing the optimiser needs from this stage is a weight per candidate site: risk times exposure within that site's coverage radius. The map shown is the prototype risk layer we used for the benchmark, built from river-distance and low-lying-terrain features; the trained model plugs into the same interface.</a:t>
             </a:r>
-            <a:endParaRPr lang="en-US" dirty="0"/>
           </a:p>
         </p:txBody>
       </p:sp>
@@ -1662,7 +1430,6 @@
               <a:rPr lang="en-US" dirty="0"/>
               <a:t>Stage two. Each candidate site is one binary decision variable, which in this formulation maps to one problem qubit. The objective rewards risk-weighted exposure covered, penalises overlap between two chosen sites, and a quadratic penalty with lambda equal to 0.6 times the largest site weight enforces exactly k units. Substituting x = (1 - z)/2 gives the Ising Hamiltonian that QAOA minimises; we verified numerically that the Ising form reproduces every QUBO energy up to a constant. The heat map is the actual 12 by 12 QUBO of the western subproblem in our benchmark. Note it is dense: the cardinality penalty couples every pair, which matters for hardware routing on the next slides.</a:t>
             </a:r>
-            <a:endParaRPr lang="en-US" dirty="0"/>
           </a:p>
         </p:txBody>
       </p:sp>
@@ -1750,7 +1517,6 @@
               <a:rPr lang="en-US" dirty="0"/>
               <a:t>Stage three: the Quantum Approximate Optimization Algorithm on a parameterized quantum circuit. Start in equal superposition; the cost layer applies ZZ rotations for overlaps and Z rotations for site rewards; the mixer applies X rotations so amplitude can move between placements; repeat p times with p equal to 1 or 2 because deeper circuits are noise-limited on NISQ hardware. The loop is explicit: a classical outer loop proposes angles, the quantum device samples bitstrings, we evaluate the conditional value-at-risk of the sampled QUBO energies with alpha 0.2 (Barkoutsos et al., Quantum 2020), and COBYLA updates the angles. For adaptation we warm-start from the previous angles (Egger et al., Quantum 2021).</a:t>
             </a:r>
-            <a:endParaRPr lang="en-US" dirty="0"/>
           </a:p>
         </p:txBody>
       </p:sp>
@@ -1823,6 +1589,11 @@
 <file path=ppt/slideMasters/slideMaster1.xml><?xml version="1.0" encoding="utf-8"?>
 <p:sldMaster xmlns:a="http://schemas.openxmlformats.org/drawingml/2006/main" xmlns:r="http://schemas.openxmlformats.org/officeDocument/2006/relationships" xmlns:p="http://schemas.openxmlformats.org/presentationml/2006/main">
   <p:cSld>
+    <p:bg>
+      <p:bgRef idx="1001">
+        <a:schemeClr val="bg1"/>
+      </p:bgRef>
+    </p:bg>
     <p:spTree>
       <p:nvGrpSpPr>
         <p:cNvPr id="1" name=""/>
@@ -2105,6 +1876,7 @@
         <a:solidFill>
           <a:srgbClr val="1C1B19"/>
         </a:solidFill>
+        <a:effectLst/>
       </p:bgPr>
     </p:bg>
     <p:spTree>
@@ -2144,7 +1916,7 @@
           </a:bodyPr>
           <a:lstStyle/>
           <a:p>
-            <a:pPr algn="l" indent="0" marL="0">
+            <a:pPr marL="0" indent="0" algn="l">
               <a:lnSpc>
                 <a:spcPts val="1680"/>
               </a:lnSpc>
@@ -2188,14 +1960,14 @@
           </a:bodyPr>
           <a:lstStyle/>
           <a:p>
-            <a:pPr algn="l" indent="0" marL="0">
+            <a:pPr marL="0" indent="0" algn="l">
               <a:lnSpc>
                 <a:spcPts val="4200"/>
               </a:lnSpc>
               <a:buNone/>
             </a:pPr>
             <a:r>
-              <a:rPr lang="en-US" sz="4000" b="1" spc="-100" kern="0" dirty="0">
+              <a:rPr lang="en-US" sz="4000" b="1" kern="0" spc="-100" dirty="0">
                 <a:solidFill>
                   <a:srgbClr val="F5F2EA"/>
                 </a:solidFill>
@@ -2232,7 +2004,7 @@
           </a:bodyPr>
           <a:lstStyle/>
           <a:p>
-            <a:pPr algn="l" indent="0" marL="0">
+            <a:pPr marL="0" indent="0" algn="l">
               <a:lnSpc>
                 <a:spcPts val="2240"/>
               </a:lnSpc>
@@ -2299,7 +2071,7 @@
           </a:bodyPr>
           <a:lstStyle/>
           <a:p>
-            <a:pPr algn="l" indent="0" marL="0">
+            <a:pPr marL="0" indent="0" algn="l">
               <a:lnSpc>
                 <a:spcPts val="1680"/>
               </a:lnSpc>
@@ -2343,7 +2115,7 @@
           </a:bodyPr>
           <a:lstStyle/>
           <a:p>
-            <a:pPr algn="l" indent="0" marL="0">
+            <a:pPr marL="0" indent="0" algn="l">
               <a:lnSpc>
                 <a:spcPts val="1680"/>
               </a:lnSpc>
@@ -2387,7 +2159,7 @@
           </a:bodyPr>
           <a:lstStyle/>
           <a:p>
-            <a:pPr algn="l" indent="0" marL="0">
+            <a:pPr marL="0" indent="0" algn="l">
               <a:lnSpc>
                 <a:spcPts val="1680"/>
               </a:lnSpc>
@@ -2410,15 +2182,15 @@
       </p:sp>
       <p:pic>
         <p:nvPicPr>
-          <p:cNvPr id="9" name="Image 0" descr="Krishna river at Vijayawada with flood-risk cells and six sites chosen by QAOA">    </p:cNvPr>
+          <p:cNvPr id="9" name="Image 0" descr="Krishna river at Vijayawada with flood-risk cells and six sites chosen by QAOA"/>
           <p:cNvPicPr>
             <a:picLocks noChangeAspect="1"/>
           </p:cNvPicPr>
           <p:nvPr/>
         </p:nvPicPr>
         <p:blipFill>
-          <a:blip r:embed="rId1"/>
-          <a:srcRect l="0" r="0" t="0" b="0"/>
+          <a:blip r:embed="rId3"/>
+          <a:srcRect/>
           <a:stretch/>
         </p:blipFill>
         <p:spPr>
@@ -2454,7 +2226,7 @@
           </a:bodyPr>
           <a:lstStyle/>
           <a:p>
-            <a:pPr algn="l" indent="0" marL="0">
+            <a:pPr marL="0" indent="0" algn="l">
               <a:lnSpc>
                 <a:spcPts val="1440"/>
               </a:lnSpc>
@@ -2498,7 +2270,7 @@
           </a:bodyPr>
           <a:lstStyle/>
           <a:p>
-            <a:pPr algn="l" indent="0" marL="0">
+            <a:pPr marL="0" indent="0" algn="l">
               <a:lnSpc>
                 <a:spcPts val="1440"/>
               </a:lnSpc>
@@ -2542,7 +2314,7 @@
           </a:bodyPr>
           <a:lstStyle/>
           <a:p>
-            <a:pPr algn="l" indent="0" marL="0">
+            <a:pPr marL="0" indent="0" algn="l">
               <a:lnSpc>
                 <a:spcPts val="1440"/>
               </a:lnSpc>
@@ -2586,7 +2358,7 @@
           </a:bodyPr>
           <a:lstStyle/>
           <a:p>
-            <a:pPr algn="l" indent="0" marL="0">
+            <a:pPr marL="0" indent="0" algn="l">
               <a:lnSpc>
                 <a:spcPts val="1440"/>
               </a:lnSpc>
@@ -2623,6 +2395,7 @@
         <a:solidFill>
           <a:srgbClr val="1C1B19"/>
         </a:solidFill>
+        <a:effectLst/>
       </p:bgPr>
     </p:bg>
     <p:spTree>
@@ -2662,7 +2435,7 @@
           </a:bodyPr>
           <a:lstStyle/>
           <a:p>
-            <a:pPr algn="l" indent="0" marL="0">
+            <a:pPr marL="0" indent="0" algn="l">
               <a:lnSpc>
                 <a:spcPts val="1680"/>
               </a:lnSpc>
@@ -2706,14 +2479,14 @@
           </a:bodyPr>
           <a:lstStyle/>
           <a:p>
-            <a:pPr algn="l" indent="0" marL="0">
+            <a:pPr marL="0" indent="0" algn="l">
               <a:lnSpc>
                 <a:spcPts val="3300"/>
               </a:lnSpc>
               <a:buNone/>
             </a:pPr>
             <a:r>
-              <a:rPr lang="en-US" sz="3000" b="1" spc="-50" kern="0" dirty="0">
+              <a:rPr lang="en-US" sz="3000" b="1" kern="0" spc="-50" dirty="0">
                 <a:solidFill>
                   <a:srgbClr val="F5F2EA"/>
                 </a:solidFill>
@@ -2775,7 +2548,7 @@
           </a:bodyPr>
           <a:lstStyle/>
           <a:p>
-            <a:pPr algn="l" indent="0" marL="0">
+            <a:pPr marL="0" indent="0" algn="l">
               <a:lnSpc>
                 <a:spcPts val="1680"/>
               </a:lnSpc>
@@ -2819,7 +2592,7 @@
           </a:bodyPr>
           <a:lstStyle/>
           <a:p>
-            <a:pPr algn="l" indent="0" marL="0">
+            <a:pPr marL="0" indent="0" algn="l">
               <a:lnSpc>
                 <a:spcPts val="1960"/>
               </a:lnSpc>
@@ -2863,7 +2636,7 @@
           </a:bodyPr>
           <a:lstStyle/>
           <a:p>
-            <a:pPr algn="l" indent="0" marL="0">
+            <a:pPr marL="0" indent="0" algn="l">
               <a:lnSpc>
                 <a:spcPts val="1680"/>
               </a:lnSpc>
@@ -2996,7 +2769,7 @@
           </a:bodyPr>
           <a:lstStyle/>
           <a:p>
-            <a:pPr algn="l" indent="0" marL="0">
+            <a:pPr marL="0" indent="0" algn="l">
               <a:lnSpc>
                 <a:spcPts val="1680"/>
               </a:lnSpc>
@@ -3040,7 +2813,7 @@
           </a:bodyPr>
           <a:lstStyle/>
           <a:p>
-            <a:pPr algn="l" indent="0" marL="0">
+            <a:pPr marL="0" indent="0" algn="l">
               <a:lnSpc>
                 <a:spcPts val="1960"/>
               </a:lnSpc>
@@ -3084,7 +2857,7 @@
           </a:bodyPr>
           <a:lstStyle/>
           <a:p>
-            <a:pPr algn="l" indent="0" marL="0">
+            <a:pPr marL="0" indent="0" algn="l">
               <a:lnSpc>
                 <a:spcPts val="1680"/>
               </a:lnSpc>
@@ -3217,7 +2990,7 @@
           </a:bodyPr>
           <a:lstStyle/>
           <a:p>
-            <a:pPr algn="l" indent="0" marL="0">
+            <a:pPr marL="0" indent="0" algn="l">
               <a:lnSpc>
                 <a:spcPts val="1680"/>
               </a:lnSpc>
@@ -3261,7 +3034,7 @@
           </a:bodyPr>
           <a:lstStyle/>
           <a:p>
-            <a:pPr algn="l" indent="0" marL="0">
+            <a:pPr marL="0" indent="0" algn="l">
               <a:lnSpc>
                 <a:spcPts val="1960"/>
               </a:lnSpc>
@@ -3305,7 +3078,7 @@
           </a:bodyPr>
           <a:lstStyle/>
           <a:p>
-            <a:pPr algn="l" indent="0" marL="0">
+            <a:pPr marL="0" indent="0" algn="l">
               <a:lnSpc>
                 <a:spcPts val="1680"/>
               </a:lnSpc>
@@ -3438,7 +3211,7 @@
           </a:bodyPr>
           <a:lstStyle/>
           <a:p>
-            <a:pPr algn="l" indent="0" marL="0">
+            <a:pPr marL="0" indent="0" algn="l">
               <a:lnSpc>
                 <a:spcPts val="1680"/>
               </a:lnSpc>
@@ -3482,7 +3255,7 @@
           </a:bodyPr>
           <a:lstStyle/>
           <a:p>
-            <a:pPr algn="l" indent="0" marL="0">
+            <a:pPr marL="0" indent="0" algn="l">
               <a:lnSpc>
                 <a:spcPts val="1960"/>
               </a:lnSpc>
@@ -3526,7 +3299,7 @@
           </a:bodyPr>
           <a:lstStyle/>
           <a:p>
-            <a:pPr algn="l" indent="0" marL="0">
+            <a:pPr marL="0" indent="0" algn="l">
               <a:lnSpc>
                 <a:spcPts val="1680"/>
               </a:lnSpc>
@@ -3659,7 +3432,7 @@
           </a:bodyPr>
           <a:lstStyle/>
           <a:p>
-            <a:pPr algn="l" indent="0" marL="0">
+            <a:pPr marL="0" indent="0" algn="l">
               <a:lnSpc>
                 <a:spcPts val="1680"/>
               </a:lnSpc>
@@ -3703,7 +3476,7 @@
           </a:bodyPr>
           <a:lstStyle/>
           <a:p>
-            <a:pPr algn="l" indent="0" marL="0">
+            <a:pPr marL="0" indent="0" algn="l">
               <a:lnSpc>
                 <a:spcPts val="1960"/>
               </a:lnSpc>
@@ -3747,7 +3520,7 @@
           </a:bodyPr>
           <a:lstStyle/>
           <a:p>
-            <a:pPr algn="l" indent="0" marL="0">
+            <a:pPr marL="0" indent="0" algn="l">
               <a:lnSpc>
                 <a:spcPts val="1680"/>
               </a:lnSpc>
@@ -3880,7 +3653,7 @@
           </a:bodyPr>
           <a:lstStyle/>
           <a:p>
-            <a:pPr algn="l" indent="0" marL="0">
+            <a:pPr marL="0" indent="0" algn="l">
               <a:lnSpc>
                 <a:spcPts val="1680"/>
               </a:lnSpc>
@@ -3924,7 +3697,7 @@
           </a:bodyPr>
           <a:lstStyle/>
           <a:p>
-            <a:pPr algn="l" indent="0" marL="0">
+            <a:pPr marL="0" indent="0" algn="l">
               <a:lnSpc>
                 <a:spcPts val="1960"/>
               </a:lnSpc>
@@ -3968,7 +3741,7 @@
           </a:bodyPr>
           <a:lstStyle/>
           <a:p>
-            <a:pPr algn="l" indent="0" marL="0">
+            <a:pPr marL="0" indent="0" algn="l">
               <a:lnSpc>
                 <a:spcPts val="1680"/>
               </a:lnSpc>
@@ -4035,7 +3808,7 @@
           </a:bodyPr>
           <a:lstStyle/>
           <a:p>
-            <a:pPr algn="l" indent="0" marL="0">
+            <a:pPr marL="0" indent="0" algn="l">
               <a:lnSpc>
                 <a:spcPts val="3200"/>
               </a:lnSpc>
@@ -4079,7 +3852,7 @@
           </a:bodyPr>
           <a:lstStyle/>
           <a:p>
-            <a:pPr algn="l" indent="0" marL="0">
+            <a:pPr marL="0" indent="0" algn="l">
               <a:lnSpc>
                 <a:spcPts val="1620"/>
               </a:lnSpc>
@@ -4146,7 +3919,7 @@
           </a:bodyPr>
           <a:lstStyle/>
           <a:p>
-            <a:pPr algn="l" indent="0" marL="0">
+            <a:pPr marL="0" indent="0" algn="l">
               <a:lnSpc>
                 <a:spcPts val="3200"/>
               </a:lnSpc>
@@ -4190,7 +3963,7 @@
           </a:bodyPr>
           <a:lstStyle/>
           <a:p>
-            <a:pPr algn="l" indent="0" marL="0">
+            <a:pPr marL="0" indent="0" algn="l">
               <a:lnSpc>
                 <a:spcPts val="1620"/>
               </a:lnSpc>
@@ -4257,7 +4030,7 @@
           </a:bodyPr>
           <a:lstStyle/>
           <a:p>
-            <a:pPr algn="l" indent="0" marL="0">
+            <a:pPr marL="0" indent="0" algn="l">
               <a:lnSpc>
                 <a:spcPts val="3200"/>
               </a:lnSpc>
@@ -4301,7 +4074,7 @@
           </a:bodyPr>
           <a:lstStyle/>
           <a:p>
-            <a:pPr algn="l" indent="0" marL="0">
+            <a:pPr marL="0" indent="0" algn="l">
               <a:lnSpc>
                 <a:spcPts val="1620"/>
               </a:lnSpc>
@@ -4345,7 +4118,7 @@
           </a:bodyPr>
           <a:lstStyle/>
           <a:p>
-            <a:pPr algn="l" indent="0" marL="0">
+            <a:pPr marL="0" indent="0" algn="l">
               <a:lnSpc>
                 <a:spcPts val="1820"/>
               </a:lnSpc>
@@ -4389,7 +4162,7 @@
           </a:bodyPr>
           <a:lstStyle/>
           <a:p>
-            <a:pPr algn="l" indent="0" marL="0">
+            <a:pPr marL="0" indent="0" algn="l">
               <a:lnSpc>
                 <a:spcPts val="1680"/>
               </a:lnSpc>
@@ -4433,7 +4206,7 @@
           </a:bodyPr>
           <a:lstStyle/>
           <a:p>
-            <a:pPr algn="r" indent="0" marL="0">
+            <a:pPr marL="0" indent="0" algn="r">
               <a:lnSpc>
                 <a:spcPts val="1680"/>
               </a:lnSpc>
@@ -4470,6 +4243,7 @@
         <a:solidFill>
           <a:srgbClr val="1C1B19"/>
         </a:solidFill>
+        <a:effectLst/>
       </p:bgPr>
     </p:bg>
     <p:spTree>
@@ -4509,7 +4283,7 @@
           </a:bodyPr>
           <a:lstStyle/>
           <a:p>
-            <a:pPr algn="l" indent="0" marL="0">
+            <a:pPr marL="0" indent="0" algn="l">
               <a:lnSpc>
                 <a:spcPts val="1680"/>
               </a:lnSpc>
@@ -4553,14 +4327,14 @@
           </a:bodyPr>
           <a:lstStyle/>
           <a:p>
-            <a:pPr algn="l" indent="0" marL="0">
+            <a:pPr marL="0" indent="0" algn="l">
               <a:lnSpc>
                 <a:spcPts val="3300"/>
               </a:lnSpc>
               <a:buNone/>
             </a:pPr>
             <a:r>
-              <a:rPr lang="en-US" sz="3000" b="1" spc="-50" kern="0" dirty="0">
+              <a:rPr lang="en-US" sz="3000" b="1" kern="0" spc="-50" dirty="0">
                 <a:solidFill>
                   <a:srgbClr val="F5F2EA"/>
                 </a:solidFill>
@@ -4597,7 +4371,7 @@
           </a:bodyPr>
           <a:lstStyle/>
           <a:p>
-            <a:pPr algn="l" indent="0" marL="0">
+            <a:pPr marL="0" indent="0" algn="l">
               <a:lnSpc>
                 <a:spcPts val="1680"/>
               </a:lnSpc>
@@ -4620,15 +4394,15 @@
       </p:sp>
       <p:pic>
         <p:nvPicPr>
-          <p:cNvPr id="5" name="Image 0" descr="Map at T0 · forecast issued: risk layer and re-optimised sites">    </p:cNvPr>
+          <p:cNvPr id="5" name="Image 0" descr="Map at T0 · forecast issued: risk layer and re-optimised sites"/>
           <p:cNvPicPr>
             <a:picLocks noChangeAspect="1"/>
           </p:cNvPicPr>
           <p:nvPr/>
         </p:nvPicPr>
         <p:blipFill>
-          <a:blip r:embed="rId1"/>
-          <a:srcRect l="0" r="0" t="0" b="0"/>
+          <a:blip r:embed="rId3"/>
+          <a:srcRect/>
           <a:stretch/>
         </p:blipFill>
         <p:spPr>
@@ -4664,7 +4438,7 @@
           </a:bodyPr>
           <a:lstStyle/>
           <a:p>
-            <a:pPr algn="l" indent="0" marL="0">
+            <a:pPr marL="0" indent="0" algn="l">
               <a:lnSpc>
                 <a:spcPts val="1820"/>
               </a:lnSpc>
@@ -4708,7 +4482,7 @@
           </a:bodyPr>
           <a:lstStyle/>
           <a:p>
-            <a:pPr algn="l" indent="0" marL="0">
+            <a:pPr marL="0" indent="0" algn="l">
               <a:lnSpc>
                 <a:spcPts val="1680"/>
               </a:lnSpc>
@@ -4731,15 +4505,15 @@
       </p:sp>
       <p:pic>
         <p:nvPicPr>
-          <p:cNvPr id="8" name="Image 1" descr="Map at T+6 h · Budameru surge: risk layer and re-optimised sites">    </p:cNvPr>
+          <p:cNvPr id="8" name="Image 1" descr="Map at T+6 h · Budameru surge: risk layer and re-optimised sites"/>
           <p:cNvPicPr>
             <a:picLocks noChangeAspect="1"/>
           </p:cNvPicPr>
           <p:nvPr/>
         </p:nvPicPr>
         <p:blipFill>
-          <a:blip r:embed="rId2"/>
-          <a:srcRect l="0" r="0" t="0" b="0"/>
+          <a:blip r:embed="rId4"/>
+          <a:srcRect/>
           <a:stretch/>
         </p:blipFill>
         <p:spPr>
@@ -4775,7 +4549,7 @@
           </a:bodyPr>
           <a:lstStyle/>
           <a:p>
-            <a:pPr algn="l" indent="0" marL="0">
+            <a:pPr marL="0" indent="0" algn="l">
               <a:lnSpc>
                 <a:spcPts val="1820"/>
               </a:lnSpc>
@@ -4819,7 +4593,7 @@
           </a:bodyPr>
           <a:lstStyle/>
           <a:p>
-            <a:pPr algn="l" indent="0" marL="0">
+            <a:pPr marL="0" indent="0" algn="l">
               <a:lnSpc>
                 <a:spcPts val="1680"/>
               </a:lnSpc>
@@ -4842,15 +4616,15 @@
       </p:sp>
       <p:pic>
         <p:nvPicPr>
-          <p:cNvPr id="11" name="Image 2" descr="Map at T+12 h · delta flooding: risk layer and re-optimised sites">    </p:cNvPr>
+          <p:cNvPr id="11" name="Image 2" descr="Map at T+12 h · delta flooding: risk layer and re-optimised sites"/>
           <p:cNvPicPr>
             <a:picLocks noChangeAspect="1"/>
           </p:cNvPicPr>
           <p:nvPr/>
         </p:nvPicPr>
         <p:blipFill>
-          <a:blip r:embed="rId3"/>
-          <a:srcRect l="0" r="0" t="0" b="0"/>
+          <a:blip r:embed="rId5"/>
+          <a:srcRect/>
           <a:stretch/>
         </p:blipFill>
         <p:spPr>
@@ -4886,7 +4660,7 @@
           </a:bodyPr>
           <a:lstStyle/>
           <a:p>
-            <a:pPr algn="l" indent="0" marL="0">
+            <a:pPr marL="0" indent="0" algn="l">
               <a:lnSpc>
                 <a:spcPts val="1820"/>
               </a:lnSpc>
@@ -4930,7 +4704,7 @@
           </a:bodyPr>
           <a:lstStyle/>
           <a:p>
-            <a:pPr algn="l" indent="0" marL="0">
+            <a:pPr marL="0" indent="0" algn="l">
               <a:lnSpc>
                 <a:spcPts val="1960"/>
               </a:lnSpc>
@@ -4985,7 +4759,7 @@
           </a:bodyPr>
           <a:lstStyle/>
           <a:p>
-            <a:pPr algn="l" indent="0" marL="0">
+            <a:pPr marL="0" indent="0" algn="l">
               <a:lnSpc>
                 <a:spcPts val="1960"/>
               </a:lnSpc>
@@ -5040,7 +4814,7 @@
           </a:bodyPr>
           <a:lstStyle/>
           <a:p>
-            <a:pPr algn="l" indent="0" marL="0">
+            <a:pPr marL="0" indent="0" algn="l">
               <a:lnSpc>
                 <a:spcPts val="1960"/>
               </a:lnSpc>
@@ -5095,7 +4869,7 @@
           </a:bodyPr>
           <a:lstStyle/>
           <a:p>
-            <a:pPr algn="l" indent="0" marL="0">
+            <a:pPr marL="0" indent="0" algn="l">
               <a:lnSpc>
                 <a:spcPts val="1680"/>
               </a:lnSpc>
@@ -5139,7 +4913,7 @@
           </a:bodyPr>
           <a:lstStyle/>
           <a:p>
-            <a:pPr algn="r" indent="0" marL="0">
+            <a:pPr marL="0" indent="0" algn="r">
               <a:lnSpc>
                 <a:spcPts val="1680"/>
               </a:lnSpc>
@@ -5176,6 +4950,7 @@
         <a:solidFill>
           <a:srgbClr val="1C1B19"/>
         </a:solidFill>
+        <a:effectLst/>
       </p:bgPr>
     </p:bg>
     <p:spTree>
@@ -5215,7 +4990,7 @@
           </a:bodyPr>
           <a:lstStyle/>
           <a:p>
-            <a:pPr algn="l" indent="0" marL="0">
+            <a:pPr marL="0" indent="0" algn="l">
               <a:lnSpc>
                 <a:spcPts val="1622"/>
               </a:lnSpc>
@@ -5259,14 +5034,14 @@
           </a:bodyPr>
           <a:lstStyle/>
           <a:p>
-            <a:pPr algn="l" indent="0" marL="0">
+            <a:pPr marL="0" indent="0" algn="l">
               <a:lnSpc>
                 <a:spcPts val="3218"/>
               </a:lnSpc>
               <a:buNone/>
             </a:pPr>
             <a:r>
-              <a:rPr lang="en-US" sz="2925" b="1" spc="-50" kern="0" dirty="0">
+              <a:rPr lang="en-US" sz="2925" b="1" kern="0" spc="-50" dirty="0">
                 <a:solidFill>
                   <a:srgbClr val="F5F2EA"/>
                 </a:solidFill>
@@ -5303,7 +5078,7 @@
           </a:bodyPr>
           <a:lstStyle/>
           <a:p>
-            <a:pPr algn="l" indent="0" marL="0">
+            <a:pPr marL="0" indent="0" algn="l">
               <a:lnSpc>
                 <a:spcPts val="1680"/>
               </a:lnSpc>
@@ -5347,7 +5122,7 @@
           </a:bodyPr>
           <a:lstStyle/>
           <a:p>
-            <a:pPr algn="l" indent="0" marL="0">
+            <a:pPr marL="0" indent="0" algn="l">
               <a:lnSpc>
                 <a:spcPts val="1820"/>
               </a:lnSpc>
@@ -5391,7 +5166,7 @@
           </a:bodyPr>
           <a:lstStyle/>
           <a:p>
-            <a:pPr algn="l" indent="0" marL="0">
+            <a:pPr marL="0" indent="0" algn="l">
               <a:lnSpc>
                 <a:spcPts val="1680"/>
               </a:lnSpc>
@@ -5455,7 +5230,7 @@
           </a:bodyPr>
           <a:lstStyle/>
           <a:p>
-            <a:pPr algn="l" indent="0" marL="0">
+            <a:pPr marL="0" indent="0" algn="l">
               <a:lnSpc>
                 <a:spcPts val="1820"/>
               </a:lnSpc>
@@ -5499,7 +5274,7 @@
           </a:bodyPr>
           <a:lstStyle/>
           <a:p>
-            <a:pPr algn="l" indent="0" marL="0">
+            <a:pPr marL="0" indent="0" algn="l">
               <a:lnSpc>
                 <a:spcPts val="1820"/>
               </a:lnSpc>
@@ -5543,7 +5318,7 @@
           </a:bodyPr>
           <a:lstStyle/>
           <a:p>
-            <a:pPr algn="l" indent="0" marL="0">
+            <a:pPr marL="0" indent="0" algn="l">
               <a:lnSpc>
                 <a:spcPts val="1680"/>
               </a:lnSpc>
@@ -5607,7 +5382,7 @@
           </a:bodyPr>
           <a:lstStyle/>
           <a:p>
-            <a:pPr algn="l" indent="0" marL="0">
+            <a:pPr marL="0" indent="0" algn="l">
               <a:lnSpc>
                 <a:spcPts val="1820"/>
               </a:lnSpc>
@@ -5651,7 +5426,7 @@
           </a:bodyPr>
           <a:lstStyle/>
           <a:p>
-            <a:pPr algn="l" indent="0" marL="0">
+            <a:pPr marL="0" indent="0" algn="l">
               <a:lnSpc>
                 <a:spcPts val="1820"/>
               </a:lnSpc>
@@ -5695,7 +5470,7 @@
           </a:bodyPr>
           <a:lstStyle/>
           <a:p>
-            <a:pPr algn="l" indent="0" marL="0">
+            <a:pPr marL="0" indent="0" algn="l">
               <a:lnSpc>
                 <a:spcPts val="1680"/>
               </a:lnSpc>
@@ -5759,7 +5534,7 @@
           </a:bodyPr>
           <a:lstStyle/>
           <a:p>
-            <a:pPr algn="l" indent="0" marL="0">
+            <a:pPr marL="0" indent="0" algn="l">
               <a:lnSpc>
                 <a:spcPts val="1820"/>
               </a:lnSpc>
@@ -5803,7 +5578,7 @@
           </a:bodyPr>
           <a:lstStyle/>
           <a:p>
-            <a:pPr algn="l" indent="0" marL="0">
+            <a:pPr marL="0" indent="0" algn="l">
               <a:lnSpc>
                 <a:spcPts val="1820"/>
               </a:lnSpc>
@@ -5847,7 +5622,7 @@
           </a:bodyPr>
           <a:lstStyle/>
           <a:p>
-            <a:pPr algn="l" indent="0" marL="0">
+            <a:pPr marL="0" indent="0" algn="l">
               <a:lnSpc>
                 <a:spcPts val="1680"/>
               </a:lnSpc>
@@ -5911,7 +5686,7 @@
           </a:bodyPr>
           <a:lstStyle/>
           <a:p>
-            <a:pPr algn="l" indent="0" marL="0">
+            <a:pPr marL="0" indent="0" algn="l">
               <a:lnSpc>
                 <a:spcPts val="1820"/>
               </a:lnSpc>
@@ -5955,7 +5730,7 @@
           </a:bodyPr>
           <a:lstStyle/>
           <a:p>
-            <a:pPr algn="l" indent="0" marL="0">
+            <a:pPr marL="0" indent="0" algn="l">
               <a:lnSpc>
                 <a:spcPts val="1680"/>
               </a:lnSpc>
@@ -5999,9 +5774,27 @@
             <a:tbl>
               <a:tblPr/>
               <a:tblGrid>
-                <a:gridCol w="2032000"/>
-                <a:gridCol w="1016000"/>
-                <a:gridCol w="1016000"/>
+                <a:gridCol w="2032000">
+                  <a:extLst>
+                    <a:ext uri="{9D8B030D-6E8A-4147-A177-3AD203B41FA5}">
+                      <a16:colId xmlns:a16="http://schemas.microsoft.com/office/drawing/2014/main" val="20000"/>
+                    </a:ext>
+                  </a:extLst>
+                </a:gridCol>
+                <a:gridCol w="1016000">
+                  <a:extLst>
+                    <a:ext uri="{9D8B030D-6E8A-4147-A177-3AD203B41FA5}">
+                      <a16:colId xmlns:a16="http://schemas.microsoft.com/office/drawing/2014/main" val="20001"/>
+                    </a:ext>
+                  </a:extLst>
+                </a:gridCol>
+                <a:gridCol w="1016000">
+                  <a:extLst>
+                    <a:ext uri="{9D8B030D-6E8A-4147-A177-3AD203B41FA5}">
+                      <a16:colId xmlns:a16="http://schemas.microsoft.com/office/drawing/2014/main" val="20002"/>
+                    </a:ext>
+                  </a:extLst>
+                </a:gridCol>
               </a:tblGrid>
               <a:tr h="330200">
                 <a:tc>
@@ -6009,7 +5802,7 @@
                     <a:bodyPr/>
                     <a:lstStyle/>
                     <a:p>
-                      <a:pPr indent="0" marL="0">
+                      <a:pPr marL="0" indent="0">
                         <a:lnSpc>
                           <a:spcPts val="1680"/>
                         </a:lnSpc>
@@ -6033,7 +5826,7 @@
                       </a:endParaRPr>
                     </a:p>
                   </a:txBody>
-                  <a:tcPr marL="53340" marR="53340" marT="53340" marB="53340" anchor="t">
+                  <a:tcPr marL="53340" marR="53340" marT="53340" marB="53340">
                     <a:lnL w="12700" cap="flat" cmpd="sng" algn="ctr">
                       <a:solidFill>
                         <a:srgbClr val="4C4A47"/>
@@ -6080,7 +5873,7 @@
                     <a:bodyPr/>
                     <a:lstStyle/>
                     <a:p>
-                      <a:pPr algn="r" indent="0" marL="0">
+                      <a:pPr marL="0" indent="0" algn="r">
                         <a:lnSpc>
                           <a:spcPts val="1680"/>
                         </a:lnSpc>
@@ -6104,7 +5897,7 @@
                       </a:endParaRPr>
                     </a:p>
                   </a:txBody>
-                  <a:tcPr marL="53340" marR="53340" marT="53340" marB="53340" anchor="t">
+                  <a:tcPr marL="53340" marR="53340" marT="53340" marB="53340">
                     <a:lnL w="12700" cap="flat" cmpd="sng" algn="ctr">
                       <a:solidFill>
                         <a:srgbClr val="4C4A47"/>
@@ -6151,7 +5944,7 @@
                     <a:bodyPr/>
                     <a:lstStyle/>
                     <a:p>
-                      <a:pPr algn="r" indent="0" marL="0">
+                      <a:pPr marL="0" indent="0" algn="r">
                         <a:lnSpc>
                           <a:spcPts val="1680"/>
                         </a:lnSpc>
@@ -6175,7 +5968,7 @@
                       </a:endParaRPr>
                     </a:p>
                   </a:txBody>
-                  <a:tcPr marL="53340" marR="53340" marT="53340" marB="53340" anchor="t">
+                  <a:tcPr marL="53340" marR="53340" marT="53340" marB="53340">
                     <a:lnL w="12700" cap="flat" cmpd="sng" algn="ctr">
                       <a:solidFill>
                         <a:srgbClr val="4C4A47"/>
@@ -6217,6 +6010,11 @@
                     </a:solidFill>
                   </a:tcPr>
                 </a:tc>
+                <a:extLst>
+                  <a:ext uri="{0D108BD9-81ED-4DB2-BD59-A6C34878D82A}">
+                    <a16:rowId xmlns:a16="http://schemas.microsoft.com/office/drawing/2014/main" val="10000"/>
+                  </a:ext>
+                </a:extLst>
               </a:tr>
               <a:tr h="330200">
                 <a:tc>
@@ -6224,7 +6022,7 @@
                     <a:bodyPr/>
                     <a:lstStyle/>
                     <a:p>
-                      <a:pPr indent="0" marL="0">
+                      <a:pPr marL="0" indent="0">
                         <a:lnSpc>
                           <a:spcPts val="1680"/>
                         </a:lnSpc>
@@ -6248,7 +6046,7 @@
                       </a:endParaRPr>
                     </a:p>
                   </a:txBody>
-                  <a:tcPr marL="53340" marR="53340" marT="53340" marB="53340" anchor="t">
+                  <a:tcPr marL="53340" marR="53340" marT="53340" marB="53340">
                     <a:lnL w="12700" cap="flat" cmpd="sng" algn="ctr">
                       <a:solidFill>
                         <a:srgbClr val="4C4A47"/>
@@ -6292,7 +6090,7 @@
                     <a:bodyPr/>
                     <a:lstStyle/>
                     <a:p>
-                      <a:pPr algn="r" indent="0" marL="0">
+                      <a:pPr marL="0" indent="0" algn="r">
                         <a:lnSpc>
                           <a:spcPts val="1680"/>
                         </a:lnSpc>
@@ -6316,7 +6114,7 @@
                       </a:endParaRPr>
                     </a:p>
                   </a:txBody>
-                  <a:tcPr marL="53340" marR="53340" marT="53340" marB="53340" anchor="t">
+                  <a:tcPr marL="53340" marR="53340" marT="53340" marB="53340">
                     <a:lnL w="12700" cap="flat" cmpd="sng" algn="ctr">
                       <a:solidFill>
                         <a:srgbClr val="4C4A47"/>
@@ -6360,7 +6158,7 @@
                     <a:bodyPr/>
                     <a:lstStyle/>
                     <a:p>
-                      <a:pPr algn="r" indent="0" marL="0">
+                      <a:pPr marL="0" indent="0" algn="r">
                         <a:lnSpc>
                           <a:spcPts val="1680"/>
                         </a:lnSpc>
@@ -6384,7 +6182,7 @@
                       </a:endParaRPr>
                     </a:p>
                   </a:txBody>
-                  <a:tcPr marL="53340" marR="53340" marT="53340" marB="53340" anchor="t">
+                  <a:tcPr marL="53340" marR="53340" marT="53340" marB="53340">
                     <a:lnL w="12700" cap="flat" cmpd="sng" algn="ctr">
                       <a:solidFill>
                         <a:srgbClr val="4C4A47"/>
@@ -6423,6 +6221,11 @@
                     </a:lnB>
                   </a:tcPr>
                 </a:tc>
+                <a:extLst>
+                  <a:ext uri="{0D108BD9-81ED-4DB2-BD59-A6C34878D82A}">
+                    <a16:rowId xmlns:a16="http://schemas.microsoft.com/office/drawing/2014/main" val="10001"/>
+                  </a:ext>
+                </a:extLst>
               </a:tr>
               <a:tr h="330200">
                 <a:tc>
@@ -6430,7 +6233,7 @@
                     <a:bodyPr/>
                     <a:lstStyle/>
                     <a:p>
-                      <a:pPr indent="0" marL="0">
+                      <a:pPr marL="0" indent="0">
                         <a:lnSpc>
                           <a:spcPts val="1680"/>
                         </a:lnSpc>
@@ -6454,7 +6257,7 @@
                       </a:endParaRPr>
                     </a:p>
                   </a:txBody>
-                  <a:tcPr marL="53340" marR="53340" marT="53340" marB="53340" anchor="t">
+                  <a:tcPr marL="53340" marR="53340" marT="53340" marB="53340">
                     <a:lnL w="12700" cap="flat" cmpd="sng" algn="ctr">
                       <a:solidFill>
                         <a:srgbClr val="4C4A47"/>
@@ -6498,7 +6301,7 @@
                     <a:bodyPr/>
                     <a:lstStyle/>
                     <a:p>
-                      <a:pPr algn="r" indent="0" marL="0">
+                      <a:pPr marL="0" indent="0" algn="r">
                         <a:lnSpc>
                           <a:spcPts val="1680"/>
                         </a:lnSpc>
@@ -6522,7 +6325,7 @@
                       </a:endParaRPr>
                     </a:p>
                   </a:txBody>
-                  <a:tcPr marL="53340" marR="53340" marT="53340" marB="53340" anchor="t">
+                  <a:tcPr marL="53340" marR="53340" marT="53340" marB="53340">
                     <a:lnL w="12700" cap="flat" cmpd="sng" algn="ctr">
                       <a:solidFill>
                         <a:srgbClr val="4C4A47"/>
@@ -6566,7 +6369,7 @@
                     <a:bodyPr/>
                     <a:lstStyle/>
                     <a:p>
-                      <a:pPr algn="r" indent="0" marL="0">
+                      <a:pPr marL="0" indent="0" algn="r">
                         <a:lnSpc>
                           <a:spcPts val="1680"/>
                         </a:lnSpc>
@@ -6590,7 +6393,7 @@
                       </a:endParaRPr>
                     </a:p>
                   </a:txBody>
-                  <a:tcPr marL="53340" marR="53340" marT="53340" marB="53340" anchor="t">
+                  <a:tcPr marL="53340" marR="53340" marT="53340" marB="53340">
                     <a:lnL w="12700" cap="flat" cmpd="sng" algn="ctr">
                       <a:solidFill>
                         <a:srgbClr val="4C4A47"/>
@@ -6629,6 +6432,11 @@
                     </a:lnB>
                   </a:tcPr>
                 </a:tc>
+                <a:extLst>
+                  <a:ext uri="{0D108BD9-81ED-4DB2-BD59-A6C34878D82A}">
+                    <a16:rowId xmlns:a16="http://schemas.microsoft.com/office/drawing/2014/main" val="10002"/>
+                  </a:ext>
+                </a:extLst>
               </a:tr>
               <a:tr h="330200">
                 <a:tc>
@@ -6636,7 +6444,7 @@
                     <a:bodyPr/>
                     <a:lstStyle/>
                     <a:p>
-                      <a:pPr indent="0" marL="0">
+                      <a:pPr marL="0" indent="0">
                         <a:lnSpc>
                           <a:spcPts val="1680"/>
                         </a:lnSpc>
@@ -6660,7 +6468,7 @@
                       </a:endParaRPr>
                     </a:p>
                   </a:txBody>
-                  <a:tcPr marL="53340" marR="53340" marT="53340" marB="53340" anchor="t">
+                  <a:tcPr marL="53340" marR="53340" marT="53340" marB="53340">
                     <a:lnL w="12700" cap="flat" cmpd="sng" algn="ctr">
                       <a:solidFill>
                         <a:srgbClr val="4C4A47"/>
@@ -6704,7 +6512,7 @@
                     <a:bodyPr/>
                     <a:lstStyle/>
                     <a:p>
-                      <a:pPr algn="r" indent="0" marL="0">
+                      <a:pPr marL="0" indent="0" algn="r">
                         <a:lnSpc>
                           <a:spcPts val="1680"/>
                         </a:lnSpc>
@@ -6728,7 +6536,7 @@
                       </a:endParaRPr>
                     </a:p>
                   </a:txBody>
-                  <a:tcPr marL="53340" marR="53340" marT="53340" marB="53340" anchor="t">
+                  <a:tcPr marL="53340" marR="53340" marT="53340" marB="53340">
                     <a:lnL w="12700" cap="flat" cmpd="sng" algn="ctr">
                       <a:solidFill>
                         <a:srgbClr val="4C4A47"/>
@@ -6772,7 +6580,7 @@
                     <a:bodyPr/>
                     <a:lstStyle/>
                     <a:p>
-                      <a:pPr algn="r" indent="0" marL="0">
+                      <a:pPr marL="0" indent="0" algn="r">
                         <a:lnSpc>
                           <a:spcPts val="1680"/>
                         </a:lnSpc>
@@ -6796,7 +6604,7 @@
                       </a:endParaRPr>
                     </a:p>
                   </a:txBody>
-                  <a:tcPr marL="53340" marR="53340" marT="53340" marB="53340" anchor="t">
+                  <a:tcPr marL="53340" marR="53340" marT="53340" marB="53340">
                     <a:lnL w="12700" cap="flat" cmpd="sng" algn="ctr">
                       <a:solidFill>
                         <a:srgbClr val="4C4A47"/>
@@ -6835,6 +6643,11 @@
                     </a:lnB>
                   </a:tcPr>
                 </a:tc>
+                <a:extLst>
+                  <a:ext uri="{0D108BD9-81ED-4DB2-BD59-A6C34878D82A}">
+                    <a16:rowId xmlns:a16="http://schemas.microsoft.com/office/drawing/2014/main" val="10003"/>
+                  </a:ext>
+                </a:extLst>
               </a:tr>
               <a:tr h="330200">
                 <a:tc>
@@ -6842,7 +6655,7 @@
                     <a:bodyPr/>
                     <a:lstStyle/>
                     <a:p>
-                      <a:pPr indent="0" marL="0">
+                      <a:pPr marL="0" indent="0">
                         <a:lnSpc>
                           <a:spcPts val="1680"/>
                         </a:lnSpc>
@@ -6866,7 +6679,7 @@
                       </a:endParaRPr>
                     </a:p>
                   </a:txBody>
-                  <a:tcPr marL="53340" marR="53340" marT="53340" marB="53340" anchor="t">
+                  <a:tcPr marL="53340" marR="53340" marT="53340" marB="53340">
                     <a:lnL w="12700" cap="flat" cmpd="sng" algn="ctr">
                       <a:solidFill>
                         <a:srgbClr val="4C4A47"/>
@@ -6910,7 +6723,7 @@
                     <a:bodyPr/>
                     <a:lstStyle/>
                     <a:p>
-                      <a:pPr algn="r" indent="0" marL="0">
+                      <a:pPr marL="0" indent="0" algn="r">
                         <a:lnSpc>
                           <a:spcPts val="1680"/>
                         </a:lnSpc>
@@ -6934,7 +6747,7 @@
                       </a:endParaRPr>
                     </a:p>
                   </a:txBody>
-                  <a:tcPr marL="53340" marR="53340" marT="53340" marB="53340" anchor="t">
+                  <a:tcPr marL="53340" marR="53340" marT="53340" marB="53340">
                     <a:lnL w="12700" cap="flat" cmpd="sng" algn="ctr">
                       <a:solidFill>
                         <a:srgbClr val="4C4A47"/>
@@ -6978,7 +6791,7 @@
                     <a:bodyPr/>
                     <a:lstStyle/>
                     <a:p>
-                      <a:pPr algn="r" indent="0" marL="0">
+                      <a:pPr marL="0" indent="0" algn="r">
                         <a:lnSpc>
                           <a:spcPts val="1680"/>
                         </a:lnSpc>
@@ -7002,7 +6815,7 @@
                       </a:endParaRPr>
                     </a:p>
                   </a:txBody>
-                  <a:tcPr marL="53340" marR="53340" marT="53340" marB="53340" anchor="t">
+                  <a:tcPr marL="53340" marR="53340" marT="53340" marB="53340">
                     <a:lnL w="12700" cap="flat" cmpd="sng" algn="ctr">
                       <a:solidFill>
                         <a:srgbClr val="4C4A47"/>
@@ -7041,6 +6854,11 @@
                     </a:lnB>
                   </a:tcPr>
                 </a:tc>
+                <a:extLst>
+                  <a:ext uri="{0D108BD9-81ED-4DB2-BD59-A6C34878D82A}">
+                    <a16:rowId xmlns:a16="http://schemas.microsoft.com/office/drawing/2014/main" val="10004"/>
+                  </a:ext>
+                </a:extLst>
               </a:tr>
               <a:tr h="330200">
                 <a:tc>
@@ -7048,7 +6866,7 @@
                     <a:bodyPr/>
                     <a:lstStyle/>
                     <a:p>
-                      <a:pPr indent="0" marL="0">
+                      <a:pPr marL="0" indent="0">
                         <a:lnSpc>
                           <a:spcPts val="1680"/>
                         </a:lnSpc>
@@ -7072,7 +6890,7 @@
                       </a:endParaRPr>
                     </a:p>
                   </a:txBody>
-                  <a:tcPr marL="53340" marR="53340" marT="53340" marB="53340" anchor="t">
+                  <a:tcPr marL="53340" marR="53340" marT="53340" marB="53340">
                     <a:lnL w="12700" cap="flat" cmpd="sng" algn="ctr">
                       <a:solidFill>
                         <a:srgbClr val="4C4A47"/>
@@ -7116,7 +6934,7 @@
                     <a:bodyPr/>
                     <a:lstStyle/>
                     <a:p>
-                      <a:pPr algn="r" indent="0" marL="0">
+                      <a:pPr marL="0" indent="0" algn="r">
                         <a:lnSpc>
                           <a:spcPts val="1680"/>
                         </a:lnSpc>
@@ -7140,7 +6958,7 @@
                       </a:endParaRPr>
                     </a:p>
                   </a:txBody>
-                  <a:tcPr marL="53340" marR="53340" marT="53340" marB="53340" anchor="t">
+                  <a:tcPr marL="53340" marR="53340" marT="53340" marB="53340">
                     <a:lnL w="12700" cap="flat" cmpd="sng" algn="ctr">
                       <a:solidFill>
                         <a:srgbClr val="4C4A47"/>
@@ -7184,7 +7002,7 @@
                     <a:bodyPr/>
                     <a:lstStyle/>
                     <a:p>
-                      <a:pPr algn="r" indent="0" marL="0">
+                      <a:pPr marL="0" indent="0" algn="r">
                         <a:lnSpc>
                           <a:spcPts val="1680"/>
                         </a:lnSpc>
@@ -7208,7 +7026,7 @@
                       </a:endParaRPr>
                     </a:p>
                   </a:txBody>
-                  <a:tcPr marL="53340" marR="53340" marT="53340" marB="53340" anchor="t">
+                  <a:tcPr marL="53340" marR="53340" marT="53340" marB="53340">
                     <a:lnL w="12700" cap="flat" cmpd="sng" algn="ctr">
                       <a:solidFill>
                         <a:srgbClr val="4C4A47"/>
@@ -7247,6 +7065,11 @@
                     </a:lnB>
                   </a:tcPr>
                 </a:tc>
+                <a:extLst>
+                  <a:ext uri="{0D108BD9-81ED-4DB2-BD59-A6C34878D82A}">
+                    <a16:rowId xmlns:a16="http://schemas.microsoft.com/office/drawing/2014/main" val="10005"/>
+                  </a:ext>
+                </a:extLst>
               </a:tr>
               <a:tr h="330200">
                 <a:tc>
@@ -7254,7 +7077,7 @@
                     <a:bodyPr/>
                     <a:lstStyle/>
                     <a:p>
-                      <a:pPr indent="0" marL="0">
+                      <a:pPr marL="0" indent="0">
                         <a:lnSpc>
                           <a:spcPts val="1680"/>
                         </a:lnSpc>
@@ -7278,7 +7101,7 @@
                       </a:endParaRPr>
                     </a:p>
                   </a:txBody>
-                  <a:tcPr marL="53340" marR="53340" marT="53340" marB="53340" anchor="t">
+                  <a:tcPr marL="53340" marR="53340" marT="53340" marB="53340">
                     <a:lnL w="12700" cap="flat" cmpd="sng" algn="ctr">
                       <a:solidFill>
                         <a:srgbClr val="4C4A47"/>
@@ -7322,7 +7145,7 @@
                     <a:bodyPr/>
                     <a:lstStyle/>
                     <a:p>
-                      <a:pPr algn="r" indent="0" marL="0">
+                      <a:pPr marL="0" indent="0" algn="r">
                         <a:lnSpc>
                           <a:spcPts val="1680"/>
                         </a:lnSpc>
@@ -7346,7 +7169,7 @@
                       </a:endParaRPr>
                     </a:p>
                   </a:txBody>
-                  <a:tcPr marL="53340" marR="53340" marT="53340" marB="53340" anchor="t">
+                  <a:tcPr marL="53340" marR="53340" marT="53340" marB="53340">
                     <a:lnL w="12700" cap="flat" cmpd="sng" algn="ctr">
                       <a:solidFill>
                         <a:srgbClr val="4C4A47"/>
@@ -7390,7 +7213,7 @@
                     <a:bodyPr/>
                     <a:lstStyle/>
                     <a:p>
-                      <a:pPr algn="r" indent="0" marL="0">
+                      <a:pPr marL="0" indent="0" algn="r">
                         <a:lnSpc>
                           <a:spcPts val="1680"/>
                         </a:lnSpc>
@@ -7414,7 +7237,7 @@
                       </a:endParaRPr>
                     </a:p>
                   </a:txBody>
-                  <a:tcPr marL="53340" marR="53340" marT="53340" marB="53340" anchor="t">
+                  <a:tcPr marL="53340" marR="53340" marT="53340" marB="53340">
                     <a:lnL w="12700" cap="flat" cmpd="sng" algn="ctr">
                       <a:solidFill>
                         <a:srgbClr val="4C4A47"/>
@@ -7453,6 +7276,11 @@
                     </a:lnB>
                   </a:tcPr>
                 </a:tc>
+                <a:extLst>
+                  <a:ext uri="{0D108BD9-81ED-4DB2-BD59-A6C34878D82A}">
+                    <a16:rowId xmlns:a16="http://schemas.microsoft.com/office/drawing/2014/main" val="10006"/>
+                  </a:ext>
+                </a:extLst>
               </a:tr>
             </a:tbl>
           </a:graphicData>
@@ -7481,7 +7309,7 @@
           </a:bodyPr>
           <a:lstStyle/>
           <a:p>
-            <a:pPr algn="l" marL="198120" indent="-168656">
+            <a:pPr marL="198120" indent="-168656" algn="l">
               <a:lnSpc>
                 <a:spcPts val="1755"/>
               </a:lnSpc>
@@ -7502,7 +7330,7 @@
             <a:endParaRPr lang="en-US" sz="1300" dirty="0"/>
           </a:p>
           <a:p>
-            <a:pPr algn="l" marL="198120" indent="-168656">
+            <a:pPr marL="198120" indent="-168656" algn="l">
               <a:lnSpc>
                 <a:spcPts val="1755"/>
               </a:lnSpc>
@@ -7523,7 +7351,7 @@
             <a:endParaRPr lang="en-US" sz="1300" dirty="0"/>
           </a:p>
           <a:p>
-            <a:pPr algn="l" marL="198120" indent="-168656">
+            <a:pPr marL="198120" indent="-168656" algn="l">
               <a:lnSpc>
                 <a:spcPts val="1755"/>
               </a:lnSpc>
@@ -7568,7 +7396,7 @@
           </a:bodyPr>
           <a:lstStyle/>
           <a:p>
-            <a:pPr algn="l" indent="0" marL="0">
+            <a:pPr marL="0" indent="0" algn="l">
               <a:lnSpc>
                 <a:spcPts val="1774"/>
               </a:lnSpc>
@@ -7645,7 +7473,7 @@
           </a:bodyPr>
           <a:lstStyle/>
           <a:p>
-            <a:pPr algn="l" indent="0" marL="0">
+            <a:pPr marL="0" indent="0" algn="l">
               <a:lnSpc>
                 <a:spcPts val="1680"/>
               </a:lnSpc>
@@ -7689,7 +7517,7 @@
           </a:bodyPr>
           <a:lstStyle/>
           <a:p>
-            <a:pPr algn="r" indent="0" marL="0">
+            <a:pPr marL="0" indent="0" algn="r">
               <a:lnSpc>
                 <a:spcPts val="1680"/>
               </a:lnSpc>
@@ -7726,6 +7554,7 @@
         <a:solidFill>
           <a:srgbClr val="1C1B19"/>
         </a:solidFill>
+        <a:effectLst/>
       </p:bgPr>
     </p:bg>
     <p:spTree>
@@ -7765,7 +7594,7 @@
           </a:bodyPr>
           <a:lstStyle/>
           <a:p>
-            <a:pPr algn="l" indent="0" marL="0">
+            <a:pPr marL="0" indent="0" algn="l">
               <a:lnSpc>
                 <a:spcPts val="1675"/>
               </a:lnSpc>
@@ -7809,14 +7638,14 @@
           </a:bodyPr>
           <a:lstStyle/>
           <a:p>
-            <a:pPr algn="l" indent="0" marL="0">
+            <a:pPr marL="0" indent="0" algn="l">
               <a:lnSpc>
                 <a:spcPts val="3269"/>
               </a:lnSpc>
               <a:buNone/>
             </a:pPr>
             <a:r>
-              <a:rPr lang="en-US" sz="2972" b="1" spc="-50" kern="0" dirty="0">
+              <a:rPr lang="en-US" sz="2972" b="1" kern="0" spc="-50" dirty="0">
                 <a:solidFill>
                   <a:srgbClr val="F5F2EA"/>
                 </a:solidFill>
@@ -7898,7 +7727,7 @@
           </a:bodyPr>
           <a:lstStyle/>
           <a:p>
-            <a:pPr algn="l" indent="0" marL="0">
+            <a:pPr marL="0" indent="0" algn="l">
               <a:lnSpc>
                 <a:spcPts val="1680"/>
               </a:lnSpc>
@@ -7942,7 +7771,7 @@
           </a:bodyPr>
           <a:lstStyle/>
           <a:p>
-            <a:pPr algn="l" indent="0" marL="0">
+            <a:pPr marL="0" indent="0" algn="l">
               <a:lnSpc>
                 <a:spcPts val="1680"/>
               </a:lnSpc>
@@ -7965,15 +7794,15 @@
       </p:sp>
       <p:pic>
         <p:nvPicPr>
-          <p:cNvPr id="8" name="Image 0" descr="Operator console map: risk layer and the QAOA placement">    </p:cNvPr>
+          <p:cNvPr id="8" name="Image 0" descr="Operator console map: risk layer and the QAOA placement"/>
           <p:cNvPicPr>
             <a:picLocks noChangeAspect="1"/>
           </p:cNvPicPr>
           <p:nvPr/>
         </p:nvPicPr>
         <p:blipFill>
-          <a:blip r:embed="rId1"/>
-          <a:srcRect l="0" r="0" t="0" b="0"/>
+          <a:blip r:embed="rId3"/>
+          <a:srcRect/>
           <a:stretch/>
         </p:blipFill>
         <p:spPr>
@@ -8009,7 +7838,7 @@
           </a:bodyPr>
           <a:lstStyle/>
           <a:p>
-            <a:pPr algn="l" indent="0" marL="0">
+            <a:pPr marL="0" indent="0" algn="l">
               <a:lnSpc>
                 <a:spcPts val="2074"/>
               </a:lnSpc>
@@ -8053,7 +7882,7 @@
           </a:bodyPr>
           <a:lstStyle/>
           <a:p>
-            <a:pPr algn="l" indent="0" marL="0">
+            <a:pPr marL="0" indent="0" algn="l">
               <a:lnSpc>
                 <a:spcPts val="1680"/>
               </a:lnSpc>
@@ -8097,7 +7926,7 @@
           </a:bodyPr>
           <a:lstStyle/>
           <a:p>
-            <a:pPr algn="l" indent="0" marL="0">
+            <a:pPr marL="0" indent="0" algn="l">
               <a:lnSpc>
                 <a:spcPts val="1680"/>
               </a:lnSpc>
@@ -8164,7 +7993,7 @@
           </a:bodyPr>
           <a:lstStyle/>
           <a:p>
-            <a:pPr algn="l" indent="0" marL="0">
+            <a:pPr marL="0" indent="0" algn="l">
               <a:lnSpc>
                 <a:spcPts val="1680"/>
               </a:lnSpc>
@@ -8208,7 +8037,7 @@
           </a:bodyPr>
           <a:lstStyle/>
           <a:p>
-            <a:pPr algn="l" indent="0" marL="0">
+            <a:pPr marL="0" indent="0" algn="l">
               <a:lnSpc>
                 <a:spcPts val="1680"/>
               </a:lnSpc>
@@ -8275,7 +8104,7 @@
           </a:bodyPr>
           <a:lstStyle/>
           <a:p>
-            <a:pPr algn="l" indent="0" marL="0">
+            <a:pPr marL="0" indent="0" algn="l">
               <a:lnSpc>
                 <a:spcPts val="1680"/>
               </a:lnSpc>
@@ -8319,7 +8148,7 @@
           </a:bodyPr>
           <a:lstStyle/>
           <a:p>
-            <a:pPr algn="l" indent="0" marL="0">
+            <a:pPr marL="0" indent="0" algn="l">
               <a:lnSpc>
                 <a:spcPts val="1680"/>
               </a:lnSpc>
@@ -8386,7 +8215,7 @@
           </a:bodyPr>
           <a:lstStyle/>
           <a:p>
-            <a:pPr algn="l" indent="0" marL="0">
+            <a:pPr marL="0" indent="0" algn="l">
               <a:lnSpc>
                 <a:spcPts val="1680"/>
               </a:lnSpc>
@@ -8430,7 +8259,7 @@
           </a:bodyPr>
           <a:lstStyle/>
           <a:p>
-            <a:pPr algn="l" indent="0" marL="0">
+            <a:pPr marL="0" indent="0" algn="l">
               <a:lnSpc>
                 <a:spcPts val="1680"/>
               </a:lnSpc>
@@ -8497,7 +8326,7 @@
           </a:bodyPr>
           <a:lstStyle/>
           <a:p>
-            <a:pPr algn="l" indent="0" marL="0">
+            <a:pPr marL="0" indent="0" algn="l">
               <a:lnSpc>
                 <a:spcPts val="1680"/>
               </a:lnSpc>
@@ -8541,7 +8370,7 @@
           </a:bodyPr>
           <a:lstStyle/>
           <a:p>
-            <a:pPr algn="l" indent="0" marL="0">
+            <a:pPr marL="0" indent="0" algn="l">
               <a:lnSpc>
                 <a:spcPts val="1680"/>
               </a:lnSpc>
@@ -8608,7 +8437,7 @@
           </a:bodyPr>
           <a:lstStyle/>
           <a:p>
-            <a:pPr algn="l" indent="0" marL="0">
+            <a:pPr marL="0" indent="0" algn="l">
               <a:lnSpc>
                 <a:spcPts val="1680"/>
               </a:lnSpc>
@@ -8652,7 +8481,7 @@
           </a:bodyPr>
           <a:lstStyle/>
           <a:p>
-            <a:pPr algn="l" indent="0" marL="0">
+            <a:pPr marL="0" indent="0" algn="l">
               <a:lnSpc>
                 <a:spcPts val="1680"/>
               </a:lnSpc>
@@ -8696,7 +8525,7 @@
           </a:bodyPr>
           <a:lstStyle/>
           <a:p>
-            <a:pPr algn="l" indent="0" marL="0">
+            <a:pPr marL="0" indent="0" algn="l">
               <a:lnSpc>
                 <a:spcPts val="1820"/>
               </a:lnSpc>
@@ -8760,7 +8589,7 @@
           </a:bodyPr>
           <a:lstStyle/>
           <a:p>
-            <a:pPr algn="l" indent="0" marL="0">
+            <a:pPr marL="0" indent="0" algn="l">
               <a:lnSpc>
                 <a:spcPts val="1680"/>
               </a:lnSpc>
@@ -8804,7 +8633,7 @@
           </a:bodyPr>
           <a:lstStyle/>
           <a:p>
-            <a:pPr algn="l" indent="0" marL="0">
+            <a:pPr marL="0" indent="0" algn="l">
               <a:lnSpc>
                 <a:spcPts val="1820"/>
               </a:lnSpc>
@@ -8868,7 +8697,7 @@
           </a:bodyPr>
           <a:lstStyle/>
           <a:p>
-            <a:pPr algn="l" indent="0" marL="0">
+            <a:pPr marL="0" indent="0" algn="l">
               <a:lnSpc>
                 <a:spcPts val="1680"/>
               </a:lnSpc>
@@ -8912,7 +8741,7 @@
           </a:bodyPr>
           <a:lstStyle/>
           <a:p>
-            <a:pPr algn="l" indent="0" marL="0">
+            <a:pPr marL="0" indent="0" algn="l">
               <a:lnSpc>
                 <a:spcPts val="1820"/>
               </a:lnSpc>
@@ -8976,7 +8805,7 @@
           </a:bodyPr>
           <a:lstStyle/>
           <a:p>
-            <a:pPr algn="l" indent="0" marL="0">
+            <a:pPr marL="0" indent="0" algn="l">
               <a:lnSpc>
                 <a:spcPts val="1680"/>
               </a:lnSpc>
@@ -9020,7 +8849,7 @@
           </a:bodyPr>
           <a:lstStyle/>
           <a:p>
-            <a:pPr algn="l" indent="0" marL="0">
+            <a:pPr marL="0" indent="0" algn="l">
               <a:lnSpc>
                 <a:spcPts val="1820"/>
               </a:lnSpc>
@@ -9084,7 +8913,7 @@
           </a:bodyPr>
           <a:lstStyle/>
           <a:p>
-            <a:pPr algn="l" indent="0" marL="0">
+            <a:pPr marL="0" indent="0" algn="l">
               <a:lnSpc>
                 <a:spcPts val="1680"/>
               </a:lnSpc>
@@ -9128,7 +8957,7 @@
           </a:bodyPr>
           <a:lstStyle/>
           <a:p>
-            <a:pPr algn="l" indent="0" marL="0">
+            <a:pPr marL="0" indent="0" algn="l">
               <a:lnSpc>
                 <a:spcPts val="1820"/>
               </a:lnSpc>
@@ -9172,7 +9001,7 @@
           </a:bodyPr>
           <a:lstStyle/>
           <a:p>
-            <a:pPr algn="l" indent="0" marL="0">
+            <a:pPr marL="0" indent="0" algn="l">
               <a:lnSpc>
                 <a:spcPts val="1680"/>
               </a:lnSpc>
@@ -9216,7 +9045,7 @@
           </a:bodyPr>
           <a:lstStyle/>
           <a:p>
-            <a:pPr algn="r" indent="0" marL="0">
+            <a:pPr marL="0" indent="0" algn="r">
               <a:lnSpc>
                 <a:spcPts val="1680"/>
               </a:lnSpc>
@@ -9253,6 +9082,7 @@
         <a:solidFill>
           <a:srgbClr val="1C1B19"/>
         </a:solidFill>
+        <a:effectLst/>
       </p:bgPr>
     </p:bg>
     <p:spTree>
@@ -9292,7 +9122,7 @@
           </a:bodyPr>
           <a:lstStyle/>
           <a:p>
-            <a:pPr algn="l" indent="0" marL="0">
+            <a:pPr marL="0" indent="0" algn="l">
               <a:lnSpc>
                 <a:spcPts val="1680"/>
               </a:lnSpc>
@@ -9336,14 +9166,14 @@
           </a:bodyPr>
           <a:lstStyle/>
           <a:p>
-            <a:pPr algn="l" indent="0" marL="0">
+            <a:pPr marL="0" indent="0" algn="l">
               <a:lnSpc>
                 <a:spcPts val="3300"/>
               </a:lnSpc>
               <a:buNone/>
             </a:pPr>
             <a:r>
-              <a:rPr lang="en-US" sz="3000" b="1" spc="-50" kern="0" dirty="0">
+              <a:rPr lang="en-US" sz="3000" b="1" kern="0" spc="-50" dirty="0">
                 <a:solidFill>
                   <a:srgbClr val="F5F2EA"/>
                 </a:solidFill>
@@ -9403,7 +9233,7 @@
           </a:bodyPr>
           <a:lstStyle/>
           <a:p>
-            <a:pPr algn="l" indent="0" marL="0">
+            <a:pPr marL="0" indent="0" algn="l">
               <a:lnSpc>
                 <a:spcPts val="2040"/>
               </a:lnSpc>
@@ -9447,7 +9277,7 @@
           </a:bodyPr>
           <a:lstStyle/>
           <a:p>
-            <a:pPr algn="l" marL="198120" indent="-168656">
+            <a:pPr marL="198120" indent="-168656" algn="l">
               <a:lnSpc>
                 <a:spcPts val="1755"/>
               </a:lnSpc>
@@ -9468,7 +9298,7 @@
             <a:endParaRPr lang="en-US" sz="1300" dirty="0"/>
           </a:p>
           <a:p>
-            <a:pPr algn="l" marL="198120" indent="-168656">
+            <a:pPr marL="198120" indent="-168656" algn="l">
               <a:lnSpc>
                 <a:spcPts val="1755"/>
               </a:lnSpc>
@@ -9489,7 +9319,7 @@
             <a:endParaRPr lang="en-US" sz="1300" dirty="0"/>
           </a:p>
           <a:p>
-            <a:pPr algn="l" marL="198120" indent="-168656">
+            <a:pPr marL="198120" indent="-168656" algn="l">
               <a:lnSpc>
                 <a:spcPts val="1755"/>
               </a:lnSpc>
@@ -9557,7 +9387,7 @@
           </a:bodyPr>
           <a:lstStyle/>
           <a:p>
-            <a:pPr algn="l" indent="0" marL="0">
+            <a:pPr marL="0" indent="0" algn="l">
               <a:lnSpc>
                 <a:spcPts val="2040"/>
               </a:lnSpc>
@@ -9601,7 +9431,7 @@
           </a:bodyPr>
           <a:lstStyle/>
           <a:p>
-            <a:pPr algn="l" marL="198120" indent="-168656">
+            <a:pPr marL="198120" indent="-168656" algn="l">
               <a:lnSpc>
                 <a:spcPts val="1755"/>
               </a:lnSpc>
@@ -9622,7 +9452,7 @@
             <a:endParaRPr lang="en-US" sz="1300" dirty="0"/>
           </a:p>
           <a:p>
-            <a:pPr algn="l" marL="198120" indent="-168656">
+            <a:pPr marL="198120" indent="-168656" algn="l">
               <a:lnSpc>
                 <a:spcPts val="1755"/>
               </a:lnSpc>
@@ -9643,7 +9473,7 @@
             <a:endParaRPr lang="en-US" sz="1300" dirty="0"/>
           </a:p>
           <a:p>
-            <a:pPr algn="l" marL="198120" indent="-168656">
+            <a:pPr marL="198120" indent="-168656" algn="l">
               <a:lnSpc>
                 <a:spcPts val="1755"/>
               </a:lnSpc>
@@ -9711,7 +9541,7 @@
           </a:bodyPr>
           <a:lstStyle/>
           <a:p>
-            <a:pPr algn="l" indent="0" marL="0">
+            <a:pPr marL="0" indent="0" algn="l">
               <a:lnSpc>
                 <a:spcPts val="2040"/>
               </a:lnSpc>
@@ -9755,7 +9585,7 @@
           </a:bodyPr>
           <a:lstStyle/>
           <a:p>
-            <a:pPr algn="l" marL="198120" indent="-168656">
+            <a:pPr marL="198120" indent="-168656" algn="l">
               <a:lnSpc>
                 <a:spcPts val="1755"/>
               </a:lnSpc>
@@ -9776,7 +9606,7 @@
             <a:endParaRPr lang="en-US" sz="1300" dirty="0"/>
           </a:p>
           <a:p>
-            <a:pPr algn="l" marL="198120" indent="-168656">
+            <a:pPr marL="198120" indent="-168656" algn="l">
               <a:lnSpc>
                 <a:spcPts val="1755"/>
               </a:lnSpc>
@@ -9797,7 +9627,7 @@
             <a:endParaRPr lang="en-US" sz="1300" dirty="0"/>
           </a:p>
           <a:p>
-            <a:pPr algn="l" marL="198120" indent="-168656">
+            <a:pPr marL="198120" indent="-168656" algn="l">
               <a:lnSpc>
                 <a:spcPts val="1755"/>
               </a:lnSpc>
@@ -9889,7 +9719,7 @@
           </a:bodyPr>
           <a:lstStyle/>
           <a:p>
-            <a:pPr algn="l" indent="0" marL="0">
+            <a:pPr marL="0" indent="0" algn="l">
               <a:lnSpc>
                 <a:spcPts val="1680"/>
               </a:lnSpc>
@@ -9933,7 +9763,7 @@
           </a:bodyPr>
           <a:lstStyle/>
           <a:p>
-            <a:pPr algn="l" indent="0" marL="0">
+            <a:pPr marL="0" indent="0" algn="l">
               <a:lnSpc>
                 <a:spcPts val="1560"/>
               </a:lnSpc>
@@ -10004,7 +9834,7 @@
           </a:bodyPr>
           <a:lstStyle/>
           <a:p>
-            <a:pPr algn="l" indent="0" marL="0">
+            <a:pPr marL="0" indent="0" algn="l">
               <a:lnSpc>
                 <a:spcPts val="1680"/>
               </a:lnSpc>
@@ -10048,7 +9878,7 @@
           </a:bodyPr>
           <a:lstStyle/>
           <a:p>
-            <a:pPr algn="l" indent="0" marL="0">
+            <a:pPr marL="0" indent="0" algn="l">
               <a:lnSpc>
                 <a:spcPts val="1560"/>
               </a:lnSpc>
@@ -10119,7 +9949,7 @@
           </a:bodyPr>
           <a:lstStyle/>
           <a:p>
-            <a:pPr algn="l" indent="0" marL="0">
+            <a:pPr marL="0" indent="0" algn="l">
               <a:lnSpc>
                 <a:spcPts val="1680"/>
               </a:lnSpc>
@@ -10163,7 +9993,7 @@
           </a:bodyPr>
           <a:lstStyle/>
           <a:p>
-            <a:pPr algn="l" indent="0" marL="0">
+            <a:pPr marL="0" indent="0" algn="l">
               <a:lnSpc>
                 <a:spcPts val="1560"/>
               </a:lnSpc>
@@ -10234,7 +10064,7 @@
           </a:bodyPr>
           <a:lstStyle/>
           <a:p>
-            <a:pPr algn="l" indent="0" marL="0">
+            <a:pPr marL="0" indent="0" algn="l">
               <a:lnSpc>
                 <a:spcPts val="1680"/>
               </a:lnSpc>
@@ -10278,7 +10108,7 @@
           </a:bodyPr>
           <a:lstStyle/>
           <a:p>
-            <a:pPr algn="l" indent="0" marL="0">
+            <a:pPr marL="0" indent="0" algn="l">
               <a:lnSpc>
                 <a:spcPts val="1560"/>
               </a:lnSpc>
@@ -10322,7 +10152,7 @@
           </a:bodyPr>
           <a:lstStyle/>
           <a:p>
-            <a:pPr algn="l" indent="0" marL="0">
+            <a:pPr marL="0" indent="0" algn="l">
               <a:lnSpc>
                 <a:spcPts val="1680"/>
               </a:lnSpc>
@@ -10366,7 +10196,7 @@
           </a:bodyPr>
           <a:lstStyle/>
           <a:p>
-            <a:pPr algn="l" indent="0" marL="0">
+            <a:pPr marL="0" indent="0" algn="l">
               <a:lnSpc>
                 <a:spcPts val="1680"/>
               </a:lnSpc>
@@ -10410,7 +10240,7 @@
           </a:bodyPr>
           <a:lstStyle/>
           <a:p>
-            <a:pPr algn="r" indent="0" marL="0">
+            <a:pPr marL="0" indent="0" algn="r">
               <a:lnSpc>
                 <a:spcPts val="1680"/>
               </a:lnSpc>
@@ -10447,6 +10277,7 @@
         <a:solidFill>
           <a:srgbClr val="1C1B19"/>
         </a:solidFill>
+        <a:effectLst/>
       </p:bgPr>
     </p:bg>
     <p:spTree>
@@ -10486,7 +10317,7 @@
           </a:bodyPr>
           <a:lstStyle/>
           <a:p>
-            <a:pPr algn="l" indent="0" marL="0">
+            <a:pPr marL="0" indent="0" algn="l">
               <a:lnSpc>
                 <a:spcPts val="1680"/>
               </a:lnSpc>
@@ -10530,14 +10361,14 @@
           </a:bodyPr>
           <a:lstStyle/>
           <a:p>
-            <a:pPr algn="l" indent="0" marL="0">
+            <a:pPr marL="0" indent="0" algn="l">
               <a:lnSpc>
                 <a:spcPts val="3456"/>
               </a:lnSpc>
               <a:buNone/>
             </a:pPr>
             <a:r>
-              <a:rPr lang="en-US" sz="3200" b="1" spc="-75" kern="0" dirty="0">
+              <a:rPr lang="en-US" sz="3200" b="1" kern="0" spc="-75" dirty="0">
                 <a:solidFill>
                   <a:srgbClr val="F5F2EA"/>
                 </a:solidFill>
@@ -10574,7 +10405,7 @@
           </a:bodyPr>
           <a:lstStyle/>
           <a:p>
-            <a:pPr algn="l" marL="213360" indent="-175768">
+            <a:pPr marL="213360" indent="-175768" algn="l">
               <a:lnSpc>
                 <a:spcPts val="1890"/>
               </a:lnSpc>
@@ -10595,7 +10426,7 @@
             <a:endParaRPr lang="en-US" sz="1400" dirty="0"/>
           </a:p>
           <a:p>
-            <a:pPr algn="l" marL="213360" indent="-175768">
+            <a:pPr marL="213360" indent="-175768" algn="l">
               <a:lnSpc>
                 <a:spcPts val="1890"/>
               </a:lnSpc>
@@ -10616,7 +10447,7 @@
             <a:endParaRPr lang="en-US" sz="1400" dirty="0"/>
           </a:p>
           <a:p>
-            <a:pPr algn="l" marL="213360" indent="-175768">
+            <a:pPr marL="213360" indent="-175768" algn="l">
               <a:lnSpc>
                 <a:spcPts val="1890"/>
               </a:lnSpc>
@@ -10663,13 +10494,13 @@
       </p:sp>
       <p:sp>
         <p:nvSpPr>
-          <p:cNvPr id="6" name="Text 4"/>
-          <p:cNvSpPr/>
-          <p:nvPr/>
-        </p:nvSpPr>
-        <p:spPr>
-          <a:xfrm>
-            <a:off x="812800" y="4391267"/>
+          <p:cNvPr id="7" name="Text 5"/>
+          <p:cNvSpPr/>
+          <p:nvPr/>
+        </p:nvSpPr>
+        <p:spPr>
+          <a:xfrm>
+            <a:off x="812800" y="5317898"/>
             <a:ext cx="4578350" cy="238760"/>
           </a:xfrm>
           <a:prstGeom prst="rect">
@@ -10684,11 +10515,10 @@
           </a:bodyPr>
           <a:lstStyle/>
           <a:p>
-            <a:pPr algn="l" indent="0" marL="0">
+            <a:pPr>
               <a:lnSpc>
                 <a:spcPts val="1680"/>
               </a:lnSpc>
-              <a:buNone/>
             </a:pPr>
             <a:r>
               <a:rPr lang="en-US" sz="1200" dirty="0">
@@ -10699,41 +10529,8 @@
                 <a:ea typeface="IBM Plex Mono" pitchFamily="34" charset="-122"/>
                 <a:cs typeface="IBM Plex Mono" pitchFamily="34" charset="-120"/>
               </a:rPr>
-              <a:t>Demo video:</a:t>
-            </a:r>
-            <a:endParaRPr lang="en-US" sz="1200" dirty="0"/>
-          </a:p>
-        </p:txBody>
-      </p:sp>
-      <p:sp>
-        <p:nvSpPr>
-          <p:cNvPr id="7" name="Text 5"/>
-          <p:cNvSpPr/>
-          <p:nvPr/>
-        </p:nvSpPr>
-        <p:spPr>
-          <a:xfrm>
-            <a:off x="812800" y="4655424"/>
-            <a:ext cx="4578350" cy="238760"/>
-          </a:xfrm>
-          <a:prstGeom prst="rect">
-            <a:avLst/>
-          </a:prstGeom>
-          <a:noFill/>
-          <a:ln/>
-        </p:spPr>
-        <p:txBody>
-          <a:bodyPr wrap="square" lIns="0" tIns="0" rIns="0" bIns="0" rtlCol="0" anchor="t">
-            <a:normAutofit/>
-          </a:bodyPr>
-          <a:lstStyle/>
-          <a:p>
-            <a:pPr algn="l" indent="0" marL="0">
-              <a:lnSpc>
-                <a:spcPts val="1680"/>
-              </a:lnSpc>
-              <a:buNone/>
-            </a:pPr>
+              <a:t>Demo link: </a:t>
+            </a:r>
             <a:r>
               <a:rPr lang="en-US" sz="1200" dirty="0">
                 <a:solidFill>
@@ -10742,9 +10539,25 @@
                 <a:latin typeface="IBM Plex Mono" pitchFamily="34" charset="0"/>
                 <a:ea typeface="IBM Plex Mono" pitchFamily="34" charset="-122"/>
                 <a:cs typeface="IBM Plex Mono" pitchFamily="34" charset="-120"/>
-              </a:rPr>
-              <a:t>Demo link:</a:t>
-            </a:r>
+                <a:hlinkClick r:id="rId3"/>
+              </a:rPr>
+              <a:t>https://disfront-seven.vercel.app/</a:t>
+            </a:r>
+            <a:endParaRPr lang="en-US" sz="1200" dirty="0">
+              <a:solidFill>
+                <a:srgbClr val="F5F2EA"/>
+              </a:solidFill>
+              <a:latin typeface="IBM Plex Mono" pitchFamily="34" charset="0"/>
+              <a:ea typeface="IBM Plex Mono" pitchFamily="34" charset="-122"/>
+              <a:cs typeface="IBM Plex Mono" pitchFamily="34" charset="-120"/>
+            </a:endParaRPr>
+          </a:p>
+          <a:p>
+            <a:pPr>
+              <a:lnSpc>
+                <a:spcPts val="1680"/>
+              </a:lnSpc>
+            </a:pPr>
             <a:endParaRPr lang="en-US" sz="1200" dirty="0"/>
           </a:p>
         </p:txBody>
@@ -10757,7 +10570,7 @@
         </p:nvSpPr>
         <p:spPr>
           <a:xfrm>
-            <a:off x="812800" y="4919582"/>
+            <a:off x="812800" y="5582056"/>
             <a:ext cx="4578350" cy="238760"/>
           </a:xfrm>
           <a:prstGeom prst="rect">
@@ -10772,7 +10585,7 @@
           </a:bodyPr>
           <a:lstStyle/>
           <a:p>
-            <a:pPr algn="l" indent="0" marL="0">
+            <a:pPr marL="0" indent="0" algn="l">
               <a:lnSpc>
                 <a:spcPts val="1680"/>
               </a:lnSpc>
@@ -10801,7 +10614,7 @@
         </p:nvSpPr>
         <p:spPr>
           <a:xfrm>
-            <a:off x="812800" y="5183746"/>
+            <a:off x="812800" y="5846220"/>
             <a:ext cx="4578350" cy="238760"/>
           </a:xfrm>
           <a:prstGeom prst="rect">
@@ -10816,7 +10629,7 @@
           </a:bodyPr>
           <a:lstStyle/>
           <a:p>
-            <a:pPr algn="l" indent="0" marL="0">
+            <a:pPr marL="0" indent="0" algn="l">
               <a:lnSpc>
                 <a:spcPts val="1680"/>
               </a:lnSpc>
@@ -10860,7 +10673,7 @@
           </a:bodyPr>
           <a:lstStyle/>
           <a:p>
-            <a:pPr algn="l" indent="0" marL="0">
+            <a:pPr marL="0" indent="0" algn="l">
               <a:lnSpc>
                 <a:spcPts val="1680"/>
               </a:lnSpc>
@@ -10904,7 +10717,7 @@
           </a:bodyPr>
           <a:lstStyle/>
           <a:p>
-            <a:pPr algn="l" indent="0" marL="0">
+            <a:pPr marL="0" indent="0" algn="l">
               <a:lnSpc>
                 <a:spcPts val="1680"/>
               </a:lnSpc>
@@ -10948,7 +10761,7 @@
           </a:bodyPr>
           <a:lstStyle/>
           <a:p>
-            <a:pPr algn="l" indent="0" marL="0">
+            <a:pPr marL="0" indent="0" algn="l">
               <a:lnSpc>
                 <a:spcPts val="1560"/>
               </a:lnSpc>
@@ -10992,7 +10805,7 @@
           </a:bodyPr>
           <a:lstStyle/>
           <a:p>
-            <a:pPr algn="l" indent="0" marL="0">
+            <a:pPr marL="0" indent="0" algn="l">
               <a:lnSpc>
                 <a:spcPts val="1560"/>
               </a:lnSpc>
@@ -11036,7 +10849,7 @@
           </a:bodyPr>
           <a:lstStyle/>
           <a:p>
-            <a:pPr algn="l" indent="0" marL="0">
+            <a:pPr marL="0" indent="0" algn="l">
               <a:lnSpc>
                 <a:spcPts val="1560"/>
               </a:lnSpc>
@@ -11080,7 +10893,7 @@
           </a:bodyPr>
           <a:lstStyle/>
           <a:p>
-            <a:pPr algn="l" indent="0" marL="0">
+            <a:pPr marL="0" indent="0" algn="l">
               <a:lnSpc>
                 <a:spcPts val="1560"/>
               </a:lnSpc>
@@ -11124,7 +10937,7 @@
           </a:bodyPr>
           <a:lstStyle/>
           <a:p>
-            <a:pPr algn="l" indent="0" marL="0">
+            <a:pPr marL="0" indent="0" algn="l">
               <a:lnSpc>
                 <a:spcPts val="1560"/>
               </a:lnSpc>
@@ -11168,7 +10981,7 @@
           </a:bodyPr>
           <a:lstStyle/>
           <a:p>
-            <a:pPr algn="l" indent="0" marL="0">
+            <a:pPr marL="0" indent="0" algn="l">
               <a:lnSpc>
                 <a:spcPts val="1560"/>
               </a:lnSpc>
@@ -11212,7 +11025,7 @@
           </a:bodyPr>
           <a:lstStyle/>
           <a:p>
-            <a:pPr algn="l" indent="0" marL="0">
+            <a:pPr marL="0" indent="0" algn="l">
               <a:lnSpc>
                 <a:spcPts val="1680"/>
               </a:lnSpc>
@@ -11256,7 +11069,7 @@
           </a:bodyPr>
           <a:lstStyle/>
           <a:p>
-            <a:pPr algn="l" indent="0" marL="0">
+            <a:pPr marL="0" indent="0" algn="l">
               <a:lnSpc>
                 <a:spcPts val="1560"/>
               </a:lnSpc>
@@ -11300,7 +11113,7 @@
           </a:bodyPr>
           <a:lstStyle/>
           <a:p>
-            <a:pPr algn="l" indent="0" marL="0">
+            <a:pPr marL="0" indent="0" algn="l">
               <a:lnSpc>
                 <a:spcPts val="1560"/>
               </a:lnSpc>
@@ -11344,7 +11157,7 @@
           </a:bodyPr>
           <a:lstStyle/>
           <a:p>
-            <a:pPr algn="l" indent="0" marL="0">
+            <a:pPr marL="0" indent="0" algn="l">
               <a:lnSpc>
                 <a:spcPts val="1560"/>
               </a:lnSpc>
@@ -11388,7 +11201,7 @@
           </a:bodyPr>
           <a:lstStyle/>
           <a:p>
-            <a:pPr algn="l" indent="0" marL="0">
+            <a:pPr marL="0" indent="0" algn="l">
               <a:lnSpc>
                 <a:spcPts val="1560"/>
               </a:lnSpc>
@@ -11432,7 +11245,7 @@
           </a:bodyPr>
           <a:lstStyle/>
           <a:p>
-            <a:pPr algn="l" indent="0" marL="0">
+            <a:pPr marL="0" indent="0" algn="l">
               <a:lnSpc>
                 <a:spcPts val="1680"/>
               </a:lnSpc>
@@ -11476,7 +11289,7 @@
           </a:bodyPr>
           <a:lstStyle/>
           <a:p>
-            <a:pPr algn="l" indent="0" marL="0">
+            <a:pPr marL="0" indent="0" algn="l">
               <a:lnSpc>
                 <a:spcPts val="1560"/>
               </a:lnSpc>
@@ -11520,7 +11333,7 @@
           </a:bodyPr>
           <a:lstStyle/>
           <a:p>
-            <a:pPr algn="l" indent="0" marL="0">
+            <a:pPr marL="0" indent="0" algn="l">
               <a:lnSpc>
                 <a:spcPts val="1560"/>
               </a:lnSpc>
@@ -11564,7 +11377,7 @@
           </a:bodyPr>
           <a:lstStyle/>
           <a:p>
-            <a:pPr algn="l" indent="0" marL="0">
+            <a:pPr marL="0" indent="0" algn="l">
               <a:lnSpc>
                 <a:spcPts val="1560"/>
               </a:lnSpc>
@@ -11608,7 +11421,7 @@
           </a:bodyPr>
           <a:lstStyle/>
           <a:p>
-            <a:pPr algn="l" indent="0" marL="0">
+            <a:pPr marL="0" indent="0" algn="l">
               <a:lnSpc>
                 <a:spcPts val="1560"/>
               </a:lnSpc>
@@ -11652,7 +11465,7 @@
           </a:bodyPr>
           <a:lstStyle/>
           <a:p>
-            <a:pPr algn="l" indent="0" marL="0">
+            <a:pPr marL="0" indent="0" algn="l">
               <a:lnSpc>
                 <a:spcPts val="1560"/>
               </a:lnSpc>
@@ -11696,7 +11509,7 @@
           </a:bodyPr>
           <a:lstStyle/>
           <a:p>
-            <a:pPr algn="l" indent="0" marL="0">
+            <a:pPr marL="0" indent="0" algn="l">
               <a:lnSpc>
                 <a:spcPts val="1680"/>
               </a:lnSpc>
@@ -11740,7 +11553,7 @@
           </a:bodyPr>
           <a:lstStyle/>
           <a:p>
-            <a:pPr algn="r" indent="0" marL="0">
+            <a:pPr marL="0" indent="0" algn="r">
               <a:lnSpc>
                 <a:spcPts val="1680"/>
               </a:lnSpc>
@@ -11758,6 +11571,71 @@
               <a:t>15 / 15</a:t>
             </a:r>
             <a:endParaRPr lang="en-US" sz="1200" dirty="0"/>
+          </a:p>
+        </p:txBody>
+      </p:sp>
+      <p:sp>
+        <p:nvSpPr>
+          <p:cNvPr id="32" name="TextBox 31">
+            <a:extLst>
+              <a:ext uri="{FF2B5EF4-FFF2-40B4-BE49-F238E27FC236}">
+                <a16:creationId xmlns:a16="http://schemas.microsoft.com/office/drawing/2014/main" id="{1732F026-DA4D-2456-7064-C98303FD0029}"/>
+              </a:ext>
+            </a:extLst>
+          </p:cNvPr>
+          <p:cNvSpPr txBox="1"/>
+          <p:nvPr/>
+        </p:nvSpPr>
+        <p:spPr>
+          <a:xfrm>
+            <a:off x="731740" y="4544396"/>
+            <a:ext cx="4897535" cy="830997"/>
+          </a:xfrm>
+          <a:prstGeom prst="rect">
+            <a:avLst/>
+          </a:prstGeom>
+          <a:noFill/>
+        </p:spPr>
+        <p:txBody>
+          <a:bodyPr wrap="square" rtlCol="0">
+            <a:spAutoFit/>
+          </a:bodyPr>
+          <a:lstStyle/>
+          <a:p>
+            <a:r>
+              <a:rPr lang="en-US" sz="1200" dirty="0">
+                <a:solidFill>
+                  <a:srgbClr val="F5F2EA"/>
+                </a:solidFill>
+                <a:latin typeface="IBM Plex Mono" pitchFamily="34" charset="0"/>
+                <a:ea typeface="IBM Plex Mono" pitchFamily="34" charset="-122"/>
+                <a:cs typeface="IBM Plex Mono" pitchFamily="34" charset="-120"/>
+              </a:rPr>
+              <a:t>Demo video link: </a:t>
+            </a:r>
+            <a:r>
+              <a:rPr lang="en-US" sz="1200" dirty="0">
+                <a:solidFill>
+                  <a:srgbClr val="F5F2EA"/>
+                </a:solidFill>
+                <a:latin typeface="IBM Plex Mono" pitchFamily="34" charset="0"/>
+                <a:ea typeface="IBM Plex Mono" pitchFamily="34" charset="-122"/>
+                <a:cs typeface="IBM Plex Mono" pitchFamily="34" charset="-120"/>
+                <a:hlinkClick r:id="rId4"/>
+              </a:rPr>
+              <a:t>https://drive.google.com/drive/folders/1dMmQkaRYk4omOo_tI-9WGVl5ThOfO9GF?usp=sharing</a:t>
+            </a:r>
+            <a:endParaRPr lang="en-US" sz="1200" dirty="0">
+              <a:solidFill>
+                <a:srgbClr val="F5F2EA"/>
+              </a:solidFill>
+              <a:latin typeface="IBM Plex Mono" pitchFamily="34" charset="0"/>
+              <a:ea typeface="IBM Plex Mono" pitchFamily="34" charset="-122"/>
+              <a:cs typeface="IBM Plex Mono" pitchFamily="34" charset="-120"/>
+            </a:endParaRPr>
+          </a:p>
+          <a:p>
+            <a:endParaRPr lang="en-IN" sz="1200" dirty="0"/>
           </a:p>
         </p:txBody>
       </p:sp>
@@ -11777,6 +11655,7 @@
         <a:solidFill>
           <a:srgbClr val="1C1B19"/>
         </a:solidFill>
+        <a:effectLst/>
       </p:bgPr>
     </p:bg>
     <p:spTree>
@@ -11816,7 +11695,7 @@
           </a:bodyPr>
           <a:lstStyle/>
           <a:p>
-            <a:pPr algn="l" indent="0" marL="0">
+            <a:pPr marL="0" indent="0" algn="l">
               <a:lnSpc>
                 <a:spcPts val="1680"/>
               </a:lnSpc>
@@ -11860,14 +11739,14 @@
           </a:bodyPr>
           <a:lstStyle/>
           <a:p>
-            <a:pPr algn="l" indent="0" marL="0">
+            <a:pPr marL="0" indent="0" algn="l">
               <a:lnSpc>
                 <a:spcPts val="3300"/>
               </a:lnSpc>
               <a:buNone/>
             </a:pPr>
             <a:r>
-              <a:rPr lang="en-US" sz="3000" b="1" spc="-50" kern="0" dirty="0">
+              <a:rPr lang="en-US" sz="3000" b="1" kern="0" spc="-50" dirty="0">
                 <a:solidFill>
                   <a:srgbClr val="F5F2EA"/>
                 </a:solidFill>
@@ -11904,7 +11783,7 @@
           </a:bodyPr>
           <a:lstStyle/>
           <a:p>
-            <a:pPr algn="l" indent="0" marL="0">
+            <a:pPr marL="0" indent="0" algn="l">
               <a:lnSpc>
                 <a:spcPts val="1680"/>
               </a:lnSpc>
@@ -11948,7 +11827,7 @@
           </a:bodyPr>
           <a:lstStyle/>
           <a:p>
-            <a:pPr algn="l" indent="0" marL="0">
+            <a:pPr marL="0" indent="0" algn="l">
               <a:lnSpc>
                 <a:spcPts val="4000"/>
               </a:lnSpc>
@@ -11992,7 +11871,7 @@
           </a:bodyPr>
           <a:lstStyle/>
           <a:p>
-            <a:pPr algn="l" indent="0" marL="0">
+            <a:pPr marL="0" indent="0" algn="l">
               <a:lnSpc>
                 <a:spcPts val="1680"/>
               </a:lnSpc>
@@ -12036,7 +11915,7 @@
           </a:bodyPr>
           <a:lstStyle/>
           <a:p>
-            <a:pPr algn="l" indent="0" marL="0">
+            <a:pPr marL="0" indent="0" algn="l">
               <a:lnSpc>
                 <a:spcPts val="4000"/>
               </a:lnSpc>
@@ -12080,7 +11959,7 @@
           </a:bodyPr>
           <a:lstStyle/>
           <a:p>
-            <a:pPr algn="l" indent="0" marL="0">
+            <a:pPr marL="0" indent="0" algn="l">
               <a:lnSpc>
                 <a:spcPts val="1680"/>
               </a:lnSpc>
@@ -12124,7 +12003,7 @@
           </a:bodyPr>
           <a:lstStyle/>
           <a:p>
-            <a:pPr algn="l" indent="0" marL="0">
+            <a:pPr marL="0" indent="0" algn="l">
               <a:lnSpc>
                 <a:spcPts val="4000"/>
               </a:lnSpc>
@@ -12168,7 +12047,7 @@
           </a:bodyPr>
           <a:lstStyle/>
           <a:p>
-            <a:pPr algn="l" indent="0" marL="0">
+            <a:pPr marL="0" indent="0" algn="l">
               <a:lnSpc>
                 <a:spcPts val="1680"/>
               </a:lnSpc>
@@ -12212,7 +12091,7 @@
           </a:bodyPr>
           <a:lstStyle/>
           <a:p>
-            <a:pPr algn="l" indent="0" marL="0">
+            <a:pPr marL="0" indent="0" algn="l">
               <a:lnSpc>
                 <a:spcPts val="4000"/>
               </a:lnSpc>
@@ -12256,7 +12135,7 @@
           </a:bodyPr>
           <a:lstStyle/>
           <a:p>
-            <a:pPr algn="l" indent="0" marL="0">
+            <a:pPr marL="0" indent="0" algn="l">
               <a:lnSpc>
                 <a:spcPts val="1680"/>
               </a:lnSpc>
@@ -12323,7 +12202,7 @@
           </a:bodyPr>
           <a:lstStyle/>
           <a:p>
-            <a:pPr algn="l" indent="0" marL="0">
+            <a:pPr marL="0" indent="0" algn="l">
               <a:lnSpc>
                 <a:spcPts val="1680"/>
               </a:lnSpc>
@@ -12367,7 +12246,7 @@
           </a:bodyPr>
           <a:lstStyle/>
           <a:p>
-            <a:pPr algn="l" indent="0" marL="0">
+            <a:pPr marL="0" indent="0" algn="l">
               <a:lnSpc>
                 <a:spcPts val="4000"/>
               </a:lnSpc>
@@ -12411,7 +12290,7 @@
           </a:bodyPr>
           <a:lstStyle/>
           <a:p>
-            <a:pPr algn="l" indent="0" marL="0">
+            <a:pPr marL="0" indent="0" algn="l">
               <a:lnSpc>
                 <a:spcPts val="1680"/>
               </a:lnSpc>
@@ -12455,7 +12334,7 @@
           </a:bodyPr>
           <a:lstStyle/>
           <a:p>
-            <a:pPr algn="l" indent="0" marL="0">
+            <a:pPr marL="0" indent="0" algn="l">
               <a:lnSpc>
                 <a:spcPts val="3200"/>
               </a:lnSpc>
@@ -12499,7 +12378,7 @@
           </a:bodyPr>
           <a:lstStyle/>
           <a:p>
-            <a:pPr algn="l" indent="0" marL="0">
+            <a:pPr marL="0" indent="0" algn="l">
               <a:lnSpc>
                 <a:spcPts val="1680"/>
               </a:lnSpc>
@@ -12543,7 +12422,7 @@
           </a:bodyPr>
           <a:lstStyle/>
           <a:p>
-            <a:pPr algn="l" indent="0" marL="0">
+            <a:pPr marL="0" indent="0" algn="l">
               <a:lnSpc>
                 <a:spcPts val="3200"/>
               </a:lnSpc>
@@ -12587,7 +12466,7 @@
           </a:bodyPr>
           <a:lstStyle/>
           <a:p>
-            <a:pPr algn="l" indent="0" marL="0">
+            <a:pPr marL="0" indent="0" algn="l">
               <a:lnSpc>
                 <a:spcPts val="1680"/>
               </a:lnSpc>
@@ -12631,7 +12510,7 @@
           </a:bodyPr>
           <a:lstStyle/>
           <a:p>
-            <a:pPr algn="l" indent="0" marL="0">
+            <a:pPr marL="0" indent="0" algn="l">
               <a:lnSpc>
                 <a:spcPts val="1960"/>
               </a:lnSpc>
@@ -12717,7 +12596,7 @@
           </a:bodyPr>
           <a:lstStyle/>
           <a:p>
-            <a:pPr algn="l" indent="0" marL="0">
+            <a:pPr marL="0" indent="0" algn="l">
               <a:lnSpc>
                 <a:spcPts val="1820"/>
               </a:lnSpc>
@@ -12781,7 +12660,7 @@
           </a:bodyPr>
           <a:lstStyle/>
           <a:p>
-            <a:pPr algn="l" indent="0" marL="0">
+            <a:pPr marL="0" indent="0" algn="l">
               <a:lnSpc>
                 <a:spcPts val="1820"/>
               </a:lnSpc>
@@ -12825,7 +12704,7 @@
           </a:bodyPr>
           <a:lstStyle/>
           <a:p>
-            <a:pPr algn="l" indent="0" marL="0">
+            <a:pPr marL="0" indent="0" algn="l">
               <a:lnSpc>
                 <a:spcPts val="1680"/>
               </a:lnSpc>
@@ -12869,7 +12748,7 @@
           </a:bodyPr>
           <a:lstStyle/>
           <a:p>
-            <a:pPr algn="r" indent="0" marL="0">
+            <a:pPr marL="0" indent="0" algn="r">
               <a:lnSpc>
                 <a:spcPts val="1680"/>
               </a:lnSpc>
@@ -12906,6 +12785,7 @@
         <a:solidFill>
           <a:srgbClr val="1C1B19"/>
         </a:solidFill>
+        <a:effectLst/>
       </p:bgPr>
     </p:bg>
     <p:spTree>
@@ -12945,7 +12825,7 @@
           </a:bodyPr>
           <a:lstStyle/>
           <a:p>
-            <a:pPr algn="l" indent="0" marL="0">
+            <a:pPr marL="0" indent="0" algn="l">
               <a:lnSpc>
                 <a:spcPts val="1680"/>
               </a:lnSpc>
@@ -12989,14 +12869,14 @@
           </a:bodyPr>
           <a:lstStyle/>
           <a:p>
-            <a:pPr algn="l" indent="0" marL="0">
+            <a:pPr marL="0" indent="0" algn="l">
               <a:lnSpc>
                 <a:spcPts val="3300"/>
               </a:lnSpc>
               <a:buNone/>
             </a:pPr>
             <a:r>
-              <a:rPr lang="en-US" sz="3000" b="1" spc="-50" kern="0" dirty="0">
+              <a:rPr lang="en-US" sz="3000" b="1" kern="0" spc="-50" dirty="0">
                 <a:solidFill>
                   <a:srgbClr val="F5F2EA"/>
                 </a:solidFill>
@@ -13033,7 +12913,7 @@
           </a:bodyPr>
           <a:lstStyle/>
           <a:p>
-            <a:pPr algn="l" indent="0" marL="0">
+            <a:pPr marL="0" indent="0" algn="l">
               <a:lnSpc>
                 <a:spcPts val="1680"/>
               </a:lnSpc>
@@ -13056,15 +12936,15 @@
       </p:sp>
       <p:pic>
         <p:nvPicPr>
-          <p:cNvPr id="5" name="Image 0" descr="Log-scale bar chart: ways to place 10 units among n candidate sites">    </p:cNvPr>
+          <p:cNvPr id="5" name="Image 0" descr="Log-scale bar chart: ways to place 10 units among n candidate sites"/>
           <p:cNvPicPr>
             <a:picLocks noChangeAspect="1"/>
           </p:cNvPicPr>
           <p:nvPr/>
         </p:nvPicPr>
         <p:blipFill>
-          <a:blip r:embed="rId1"/>
-          <a:srcRect l="0" r="0" t="0" b="0"/>
+          <a:blip r:embed="rId3"/>
+          <a:srcRect/>
           <a:stretch/>
         </p:blipFill>
         <p:spPr>
@@ -13100,7 +12980,7 @@
           </a:bodyPr>
           <a:lstStyle/>
           <a:p>
-            <a:pPr algn="ctr" indent="0" marL="0">
+            <a:pPr marL="0" indent="0" algn="ctr">
               <a:lnSpc>
                 <a:spcPts val="1680"/>
               </a:lnSpc>
@@ -13144,7 +13024,7 @@
           </a:bodyPr>
           <a:lstStyle/>
           <a:p>
-            <a:pPr algn="ctr" indent="0" marL="0">
+            <a:pPr marL="0" indent="0" algn="ctr">
               <a:lnSpc>
                 <a:spcPts val="1680"/>
               </a:lnSpc>
@@ -13188,7 +13068,7 @@
           </a:bodyPr>
           <a:lstStyle/>
           <a:p>
-            <a:pPr algn="ctr" indent="0" marL="0">
+            <a:pPr marL="0" indent="0" algn="ctr">
               <a:lnSpc>
                 <a:spcPts val="1680"/>
               </a:lnSpc>
@@ -13232,7 +13112,7 @@
           </a:bodyPr>
           <a:lstStyle/>
           <a:p>
-            <a:pPr algn="ctr" indent="0" marL="0">
+            <a:pPr marL="0" indent="0" algn="ctr">
               <a:lnSpc>
                 <a:spcPts val="1680"/>
               </a:lnSpc>
@@ -13276,7 +13156,7 @@
           </a:bodyPr>
           <a:lstStyle/>
           <a:p>
-            <a:pPr algn="ctr" indent="0" marL="0">
+            <a:pPr marL="0" indent="0" algn="ctr">
               <a:lnSpc>
                 <a:spcPts val="1680"/>
               </a:lnSpc>
@@ -13320,7 +13200,7 @@
           </a:bodyPr>
           <a:lstStyle/>
           <a:p>
-            <a:pPr algn="ctr" indent="0" marL="0">
+            <a:pPr marL="0" indent="0" algn="ctr">
               <a:lnSpc>
                 <a:spcPts val="1680"/>
               </a:lnSpc>
@@ -13364,7 +13244,7 @@
           </a:bodyPr>
           <a:lstStyle/>
           <a:p>
-            <a:pPr algn="ctr" indent="0" marL="0">
+            <a:pPr marL="0" indent="0" algn="ctr">
               <a:lnSpc>
                 <a:spcPts val="1680"/>
               </a:lnSpc>
@@ -13408,7 +13288,7 @@
           </a:bodyPr>
           <a:lstStyle/>
           <a:p>
-            <a:pPr algn="ctr" indent="0" marL="0">
+            <a:pPr marL="0" indent="0" algn="ctr">
               <a:lnSpc>
                 <a:spcPts val="1680"/>
               </a:lnSpc>
@@ -13452,7 +13332,7 @@
           </a:bodyPr>
           <a:lstStyle/>
           <a:p>
-            <a:pPr algn="ctr" indent="0" marL="0">
+            <a:pPr marL="0" indent="0" algn="ctr">
               <a:lnSpc>
                 <a:spcPts val="1680"/>
               </a:lnSpc>
@@ -13496,7 +13376,7 @@
           </a:bodyPr>
           <a:lstStyle/>
           <a:p>
-            <a:pPr algn="ctr" indent="0" marL="0">
+            <a:pPr marL="0" indent="0" algn="ctr">
               <a:lnSpc>
                 <a:spcPts val="1680"/>
               </a:lnSpc>
@@ -13540,7 +13420,7 @@
           </a:bodyPr>
           <a:lstStyle/>
           <a:p>
-            <a:pPr algn="l" indent="0" marL="0">
+            <a:pPr marL="0" indent="0" algn="l">
               <a:lnSpc>
                 <a:spcPts val="4800"/>
               </a:lnSpc>
@@ -13584,7 +13464,7 @@
           </a:bodyPr>
           <a:lstStyle/>
           <a:p>
-            <a:pPr algn="l" indent="0" marL="0">
+            <a:pPr marL="0" indent="0" algn="l">
               <a:lnSpc>
                 <a:spcPts val="1960"/>
               </a:lnSpc>
@@ -13628,7 +13508,7 @@
           </a:bodyPr>
           <a:lstStyle/>
           <a:p>
-            <a:pPr algn="l" marL="228600" indent="-182880">
+            <a:pPr marL="228600" indent="-182880" algn="l">
               <a:lnSpc>
                 <a:spcPts val="2025"/>
               </a:lnSpc>
@@ -13649,7 +13529,7 @@
             <a:endParaRPr lang="en-US" sz="1500" dirty="0"/>
           </a:p>
           <a:p>
-            <a:pPr algn="l" marL="228600" indent="-182880">
+            <a:pPr marL="228600" indent="-182880" algn="l">
               <a:lnSpc>
                 <a:spcPts val="2025"/>
               </a:lnSpc>
@@ -13670,7 +13550,7 @@
             <a:endParaRPr lang="en-US" sz="1500" dirty="0"/>
           </a:p>
           <a:p>
-            <a:pPr algn="l" marL="228600" indent="-182880">
+            <a:pPr marL="228600" indent="-182880" algn="l">
               <a:lnSpc>
                 <a:spcPts val="2025"/>
               </a:lnSpc>
@@ -13691,7 +13571,7 @@
             <a:endParaRPr lang="en-US" sz="1500" dirty="0"/>
           </a:p>
           <a:p>
-            <a:pPr algn="l" marL="228600" indent="-182880">
+            <a:pPr marL="228600" indent="-182880" algn="l">
               <a:lnSpc>
                 <a:spcPts val="2025"/>
               </a:lnSpc>
@@ -13736,7 +13616,7 @@
           </a:bodyPr>
           <a:lstStyle/>
           <a:p>
-            <a:pPr algn="l" indent="0" marL="0">
+            <a:pPr marL="0" indent="0" algn="l">
               <a:lnSpc>
                 <a:spcPts val="1680"/>
               </a:lnSpc>
@@ -13780,7 +13660,7 @@
           </a:bodyPr>
           <a:lstStyle/>
           <a:p>
-            <a:pPr algn="r" indent="0" marL="0">
+            <a:pPr marL="0" indent="0" algn="r">
               <a:lnSpc>
                 <a:spcPts val="1680"/>
               </a:lnSpc>
@@ -13817,6 +13697,7 @@
         <a:solidFill>
           <a:srgbClr val="1C1B19"/>
         </a:solidFill>
+        <a:effectLst/>
       </p:bgPr>
     </p:bg>
     <p:spTree>
@@ -13856,7 +13737,7 @@
           </a:bodyPr>
           <a:lstStyle/>
           <a:p>
-            <a:pPr algn="l" indent="0" marL="0">
+            <a:pPr marL="0" indent="0" algn="l">
               <a:lnSpc>
                 <a:spcPts val="1680"/>
               </a:lnSpc>
@@ -13900,14 +13781,14 @@
           </a:bodyPr>
           <a:lstStyle/>
           <a:p>
-            <a:pPr algn="l" indent="0" marL="0">
+            <a:pPr marL="0" indent="0" algn="l">
               <a:lnSpc>
                 <a:spcPts val="3300"/>
               </a:lnSpc>
               <a:buNone/>
             </a:pPr>
             <a:r>
-              <a:rPr lang="en-US" sz="3000" b="1" spc="-50" kern="0" dirty="0">
+              <a:rPr lang="en-US" sz="3000" b="1" kern="0" spc="-50" dirty="0">
                 <a:solidFill>
                   <a:srgbClr val="F5F2EA"/>
                 </a:solidFill>
@@ -13944,7 +13825,7 @@
           </a:bodyPr>
           <a:lstStyle/>
           <a:p>
-            <a:pPr algn="l" indent="0" marL="0">
+            <a:pPr marL="0" indent="0" algn="l">
               <a:lnSpc>
                 <a:spcPts val="1680"/>
               </a:lnSpc>
@@ -14013,7 +13894,7 @@
           </a:bodyPr>
           <a:lstStyle/>
           <a:p>
-            <a:pPr algn="l" indent="0" marL="0">
+            <a:pPr marL="0" indent="0" algn="l">
               <a:lnSpc>
                 <a:spcPts val="1820"/>
               </a:lnSpc>
@@ -14057,7 +13938,7 @@
           </a:bodyPr>
           <a:lstStyle/>
           <a:p>
-            <a:pPr algn="l" indent="0" marL="0">
+            <a:pPr marL="0" indent="0" algn="l">
               <a:lnSpc>
                 <a:spcPts val="1680"/>
               </a:lnSpc>
@@ -14080,15 +13961,15 @@
       </p:sp>
       <p:pic>
         <p:nvPicPr>
-          <p:cNvPr id="8" name="Image 0" descr="arrow">    </p:cNvPr>
+          <p:cNvPr id="8" name="Image 0" descr="arrow"/>
           <p:cNvPicPr>
             <a:picLocks noChangeAspect="1"/>
           </p:cNvPicPr>
           <p:nvPr/>
         </p:nvPicPr>
         <p:blipFill>
-          <a:blip r:embed="rId1"/>
-          <a:srcRect l="0" r="0" t="0" b="0"/>
+          <a:blip r:embed="rId3"/>
+          <a:srcRect/>
           <a:stretch/>
         </p:blipFill>
         <p:spPr>
@@ -14149,7 +14030,7 @@
           </a:bodyPr>
           <a:lstStyle/>
           <a:p>
-            <a:pPr algn="l" indent="0" marL="0">
+            <a:pPr marL="0" indent="0" algn="l">
               <a:lnSpc>
                 <a:spcPts val="1625"/>
               </a:lnSpc>
@@ -14193,7 +14074,7 @@
           </a:bodyPr>
           <a:lstStyle/>
           <a:p>
-            <a:pPr algn="l" indent="0" marL="0">
+            <a:pPr marL="0" indent="0" algn="l">
               <a:lnSpc>
                 <a:spcPts val="1560"/>
               </a:lnSpc>
@@ -14262,7 +14143,7 @@
           </a:bodyPr>
           <a:lstStyle/>
           <a:p>
-            <a:pPr algn="l" indent="0" marL="0">
+            <a:pPr marL="0" indent="0" algn="l">
               <a:lnSpc>
                 <a:spcPts val="1820"/>
               </a:lnSpc>
@@ -14306,7 +14187,7 @@
           </a:bodyPr>
           <a:lstStyle/>
           <a:p>
-            <a:pPr algn="l" indent="0" marL="0">
+            <a:pPr marL="0" indent="0" algn="l">
               <a:lnSpc>
                 <a:spcPts val="1680"/>
               </a:lnSpc>
@@ -14329,15 +14210,15 @@
       </p:sp>
       <p:pic>
         <p:nvPicPr>
-          <p:cNvPr id="15" name="Image 1" descr="arrow">    </p:cNvPr>
+          <p:cNvPr id="15" name="Image 1" descr="arrow"/>
           <p:cNvPicPr>
             <a:picLocks noChangeAspect="1"/>
           </p:cNvPicPr>
           <p:nvPr/>
         </p:nvPicPr>
         <p:blipFill>
-          <a:blip r:embed="rId2"/>
-          <a:srcRect l="0" r="0" t="0" b="0"/>
+          <a:blip r:embed="rId3"/>
+          <a:srcRect/>
           <a:stretch/>
         </p:blipFill>
         <p:spPr>
@@ -14398,7 +14279,7 @@
           </a:bodyPr>
           <a:lstStyle/>
           <a:p>
-            <a:pPr algn="l" indent="0" marL="0">
+            <a:pPr marL="0" indent="0" algn="l">
               <a:lnSpc>
                 <a:spcPts val="1625"/>
               </a:lnSpc>
@@ -14442,7 +14323,7 @@
           </a:bodyPr>
           <a:lstStyle/>
           <a:p>
-            <a:pPr algn="l" indent="0" marL="0">
+            <a:pPr marL="0" indent="0" algn="l">
               <a:lnSpc>
                 <a:spcPts val="1560"/>
               </a:lnSpc>
@@ -14511,7 +14392,7 @@
           </a:bodyPr>
           <a:lstStyle/>
           <a:p>
-            <a:pPr algn="l" indent="0" marL="0">
+            <a:pPr marL="0" indent="0" algn="l">
               <a:lnSpc>
                 <a:spcPts val="1820"/>
               </a:lnSpc>
@@ -14555,7 +14436,7 @@
           </a:bodyPr>
           <a:lstStyle/>
           <a:p>
-            <a:pPr algn="l" indent="0" marL="0">
+            <a:pPr marL="0" indent="0" algn="l">
               <a:lnSpc>
                 <a:spcPts val="1680"/>
               </a:lnSpc>
@@ -14578,7 +14459,7 @@
       </p:sp>
       <p:pic>
         <p:nvPicPr>
-          <p:cNvPr id="22" name="Image 2" descr="arrow">    </p:cNvPr>
+          <p:cNvPr id="22" name="Image 2" descr="arrow"/>
           <p:cNvPicPr>
             <a:picLocks noChangeAspect="1"/>
           </p:cNvPicPr>
@@ -14586,7 +14467,7 @@
         </p:nvPicPr>
         <p:blipFill>
           <a:blip r:embed="rId3"/>
-          <a:srcRect l="0" r="0" t="0" b="0"/>
+          <a:srcRect/>
           <a:stretch/>
         </p:blipFill>
         <p:spPr>
@@ -14647,7 +14528,7 @@
           </a:bodyPr>
           <a:lstStyle/>
           <a:p>
-            <a:pPr algn="l" indent="0" marL="0">
+            <a:pPr marL="0" indent="0" algn="l">
               <a:lnSpc>
                 <a:spcPts val="1625"/>
               </a:lnSpc>
@@ -14691,7 +14572,7 @@
           </a:bodyPr>
           <a:lstStyle/>
           <a:p>
-            <a:pPr algn="l" indent="0" marL="0">
+            <a:pPr marL="0" indent="0" algn="l">
               <a:lnSpc>
                 <a:spcPts val="1560"/>
               </a:lnSpc>
@@ -14735,7 +14616,7 @@
           </a:bodyPr>
           <a:lstStyle/>
           <a:p>
-            <a:pPr algn="l" indent="0" marL="0">
+            <a:pPr marL="0" indent="0" algn="l">
               <a:lnSpc>
                 <a:spcPts val="1620"/>
               </a:lnSpc>
@@ -14779,7 +14660,7 @@
           </a:bodyPr>
           <a:lstStyle/>
           <a:p>
-            <a:pPr algn="l" indent="0" marL="0">
+            <a:pPr marL="0" indent="0" algn="l">
               <a:lnSpc>
                 <a:spcPts val="1680"/>
               </a:lnSpc>
@@ -14848,7 +14729,7 @@
           </a:bodyPr>
           <a:lstStyle/>
           <a:p>
-            <a:pPr algn="l" indent="0" marL="0">
+            <a:pPr marL="0" indent="0" algn="l">
               <a:lnSpc>
                 <a:spcPts val="1625"/>
               </a:lnSpc>
@@ -14871,7 +14752,7 @@
       </p:sp>
       <p:pic>
         <p:nvPicPr>
-          <p:cNvPr id="30" name="Image 3" descr="arrow">    </p:cNvPr>
+          <p:cNvPr id="30" name="Image 3" descr="arrow"/>
           <p:cNvPicPr>
             <a:picLocks noChangeAspect="1"/>
           </p:cNvPicPr>
@@ -14879,7 +14760,7 @@
         </p:nvPicPr>
         <p:blipFill>
           <a:blip r:embed="rId4"/>
-          <a:srcRect l="0" r="0" t="0" b="0"/>
+          <a:srcRect/>
           <a:stretch/>
         </p:blipFill>
         <p:spPr>
@@ -14940,7 +14821,7 @@
           </a:bodyPr>
           <a:lstStyle/>
           <a:p>
-            <a:pPr algn="l" indent="0" marL="0">
+            <a:pPr marL="0" indent="0" algn="l">
               <a:lnSpc>
                 <a:spcPts val="1625"/>
               </a:lnSpc>
@@ -14963,15 +14844,15 @@
       </p:sp>
       <p:pic>
         <p:nvPicPr>
-          <p:cNvPr id="33" name="Image 4" descr="arrow">    </p:cNvPr>
+          <p:cNvPr id="33" name="Image 4" descr="arrow"/>
           <p:cNvPicPr>
             <a:picLocks noChangeAspect="1"/>
           </p:cNvPicPr>
           <p:nvPr/>
         </p:nvPicPr>
         <p:blipFill>
-          <a:blip r:embed="rId5"/>
-          <a:srcRect l="0" r="0" t="0" b="0"/>
+          <a:blip r:embed="rId4"/>
+          <a:srcRect/>
           <a:stretch/>
         </p:blipFill>
         <p:spPr>
@@ -15032,7 +14913,7 @@
           </a:bodyPr>
           <a:lstStyle/>
           <a:p>
-            <a:pPr algn="l" indent="0" marL="0">
+            <a:pPr marL="0" indent="0" algn="l">
               <a:lnSpc>
                 <a:spcPts val="1625"/>
               </a:lnSpc>
@@ -15055,15 +14936,15 @@
       </p:sp>
       <p:pic>
         <p:nvPicPr>
-          <p:cNvPr id="36" name="Image 5" descr="arrow">    </p:cNvPr>
+          <p:cNvPr id="36" name="Image 5" descr="arrow"/>
           <p:cNvPicPr>
             <a:picLocks noChangeAspect="1"/>
           </p:cNvPicPr>
           <p:nvPr/>
         </p:nvPicPr>
         <p:blipFill>
-          <a:blip r:embed="rId6"/>
-          <a:srcRect l="0" r="0" t="0" b="0"/>
+          <a:blip r:embed="rId4"/>
+          <a:srcRect/>
           <a:stretch/>
         </p:blipFill>
         <p:spPr>
@@ -15124,7 +15005,7 @@
           </a:bodyPr>
           <a:lstStyle/>
           <a:p>
-            <a:pPr algn="l" indent="0" marL="0">
+            <a:pPr marL="0" indent="0" algn="l">
               <a:lnSpc>
                 <a:spcPts val="1625"/>
               </a:lnSpc>
@@ -15147,15 +15028,15 @@
       </p:sp>
       <p:pic>
         <p:nvPicPr>
-          <p:cNvPr id="39" name="Image 6" descr="arrow">    </p:cNvPr>
+          <p:cNvPr id="39" name="Image 6" descr="arrow"/>
           <p:cNvPicPr>
             <a:picLocks noChangeAspect="1"/>
           </p:cNvPicPr>
           <p:nvPr/>
         </p:nvPicPr>
         <p:blipFill>
-          <a:blip r:embed="rId7"/>
-          <a:srcRect l="0" r="0" t="0" b="0"/>
+          <a:blip r:embed="rId4"/>
+          <a:srcRect/>
           <a:stretch/>
         </p:blipFill>
         <p:spPr>
@@ -15216,7 +15097,7 @@
           </a:bodyPr>
           <a:lstStyle/>
           <a:p>
-            <a:pPr algn="l" indent="0" marL="0">
+            <a:pPr marL="0" indent="0" algn="l">
               <a:lnSpc>
                 <a:spcPts val="1625"/>
               </a:lnSpc>
@@ -15260,7 +15141,7 @@
           </a:bodyPr>
           <a:lstStyle/>
           <a:p>
-            <a:pPr algn="l" indent="0" marL="0">
+            <a:pPr marL="0" indent="0" algn="l">
               <a:lnSpc>
                 <a:spcPts val="2210"/>
               </a:lnSpc>
@@ -15315,7 +15196,7 @@
           </a:bodyPr>
           <a:lstStyle/>
           <a:p>
-            <a:pPr algn="l" indent="0" marL="0">
+            <a:pPr marL="0" indent="0" algn="l">
               <a:lnSpc>
                 <a:spcPts val="1680"/>
               </a:lnSpc>
@@ -15359,7 +15240,7 @@
           </a:bodyPr>
           <a:lstStyle/>
           <a:p>
-            <a:pPr algn="r" indent="0" marL="0">
+            <a:pPr marL="0" indent="0" algn="r">
               <a:lnSpc>
                 <a:spcPts val="1680"/>
               </a:lnSpc>
@@ -15396,6 +15277,7 @@
         <a:solidFill>
           <a:srgbClr val="1C1B19"/>
         </a:solidFill>
+        <a:effectLst/>
       </p:bgPr>
     </p:bg>
     <p:spTree>
@@ -15435,7 +15317,7 @@
           </a:bodyPr>
           <a:lstStyle/>
           <a:p>
-            <a:pPr algn="l" indent="0" marL="0">
+            <a:pPr marL="0" indent="0" algn="l">
               <a:lnSpc>
                 <a:spcPts val="1622"/>
               </a:lnSpc>
@@ -15479,14 +15361,14 @@
           </a:bodyPr>
           <a:lstStyle/>
           <a:p>
-            <a:pPr algn="l" indent="0" marL="0">
+            <a:pPr marL="0" indent="0" algn="l">
               <a:lnSpc>
                 <a:spcPts val="3218"/>
               </a:lnSpc>
               <a:buNone/>
             </a:pPr>
             <a:r>
-              <a:rPr lang="en-US" sz="2925" b="1" spc="-50" kern="0" dirty="0">
+              <a:rPr lang="en-US" sz="2925" b="1" kern="0" spc="-50" dirty="0">
                 <a:solidFill>
                   <a:srgbClr val="F5F2EA"/>
                 </a:solidFill>
@@ -15523,7 +15405,7 @@
           </a:bodyPr>
           <a:lstStyle/>
           <a:p>
-            <a:pPr algn="l" indent="0" marL="0">
+            <a:pPr marL="0" indent="0" algn="l">
               <a:lnSpc>
                 <a:spcPts val="1680"/>
               </a:lnSpc>
@@ -15592,7 +15474,7 @@
           </a:bodyPr>
           <a:lstStyle/>
           <a:p>
-            <a:pPr algn="l" indent="0" marL="0">
+            <a:pPr marL="0" indent="0" algn="l">
               <a:lnSpc>
                 <a:spcPts val="1820"/>
               </a:lnSpc>
@@ -15636,7 +15518,7 @@
           </a:bodyPr>
           <a:lstStyle/>
           <a:p>
-            <a:pPr algn="l" indent="0" marL="0">
+            <a:pPr marL="0" indent="0" algn="l">
               <a:lnSpc>
                 <a:spcPts val="1680"/>
               </a:lnSpc>
@@ -15705,7 +15587,7 @@
           </a:bodyPr>
           <a:lstStyle/>
           <a:p>
-            <a:pPr algn="l" indent="0" marL="0">
+            <a:pPr marL="0" indent="0" algn="l">
               <a:lnSpc>
                 <a:spcPts val="1820"/>
               </a:lnSpc>
@@ -15749,7 +15631,7 @@
           </a:bodyPr>
           <a:lstStyle/>
           <a:p>
-            <a:pPr algn="l" indent="0" marL="0">
+            <a:pPr marL="0" indent="0" algn="l">
               <a:lnSpc>
                 <a:spcPts val="1680"/>
               </a:lnSpc>
@@ -15818,7 +15700,7 @@
           </a:bodyPr>
           <a:lstStyle/>
           <a:p>
-            <a:pPr algn="l" indent="0" marL="0">
+            <a:pPr marL="0" indent="0" algn="l">
               <a:lnSpc>
                 <a:spcPts val="1820"/>
               </a:lnSpc>
@@ -15862,7 +15744,7 @@
           </a:bodyPr>
           <a:lstStyle/>
           <a:p>
-            <a:pPr algn="l" indent="0" marL="0">
+            <a:pPr marL="0" indent="0" algn="l">
               <a:lnSpc>
                 <a:spcPts val="1680"/>
               </a:lnSpc>
@@ -15931,7 +15813,7 @@
           </a:bodyPr>
           <a:lstStyle/>
           <a:p>
-            <a:pPr algn="l" indent="0" marL="0">
+            <a:pPr marL="0" indent="0" algn="l">
               <a:lnSpc>
                 <a:spcPts val="1820"/>
               </a:lnSpc>
@@ -15975,7 +15857,7 @@
           </a:bodyPr>
           <a:lstStyle/>
           <a:p>
-            <a:pPr algn="l" indent="0" marL="0">
+            <a:pPr marL="0" indent="0" algn="l">
               <a:lnSpc>
                 <a:spcPts val="1680"/>
               </a:lnSpc>
@@ -15998,15 +15880,15 @@
       </p:sp>
       <p:pic>
         <p:nvPicPr>
-          <p:cNvPr id="17" name="Image 0" descr="arrow">    </p:cNvPr>
+          <p:cNvPr id="17" name="Image 0" descr="arrow"/>
           <p:cNvPicPr>
             <a:picLocks noChangeAspect="1"/>
           </p:cNvPicPr>
           <p:nvPr/>
         </p:nvPicPr>
         <p:blipFill>
-          <a:blip r:embed="rId1"/>
-          <a:srcRect l="0" r="0" t="-8333" b="-8333"/>
+          <a:blip r:embed="rId3"/>
+          <a:srcRect t="-8333" b="-8333"/>
           <a:stretch/>
         </p:blipFill>
         <p:spPr>
@@ -16042,7 +15924,7 @@
           </a:bodyPr>
           <a:lstStyle/>
           <a:p>
-            <a:pPr algn="l" indent="0" marL="0">
+            <a:pPr marL="0" indent="0" algn="l">
               <a:lnSpc>
                 <a:spcPts val="1622"/>
               </a:lnSpc>
@@ -16111,7 +15993,7 @@
           </a:bodyPr>
           <a:lstStyle/>
           <a:p>
-            <a:pPr algn="l" indent="0" marL="0">
+            <a:pPr marL="0" indent="0" algn="l">
               <a:lnSpc>
                 <a:spcPts val="1774"/>
               </a:lnSpc>
@@ -16155,7 +16037,7 @@
           </a:bodyPr>
           <a:lstStyle/>
           <a:p>
-            <a:pPr algn="l" indent="0" marL="0">
+            <a:pPr marL="0" indent="0" algn="l">
               <a:lnSpc>
                 <a:spcPts val="1622"/>
               </a:lnSpc>
@@ -16224,7 +16106,7 @@
           </a:bodyPr>
           <a:lstStyle/>
           <a:p>
-            <a:pPr algn="l" indent="0" marL="0">
+            <a:pPr marL="0" indent="0" algn="l">
               <a:lnSpc>
                 <a:spcPts val="1774"/>
               </a:lnSpc>
@@ -16268,7 +16150,7 @@
           </a:bodyPr>
           <a:lstStyle/>
           <a:p>
-            <a:pPr algn="l" indent="0" marL="0">
+            <a:pPr marL="0" indent="0" algn="l">
               <a:lnSpc>
                 <a:spcPts val="1622"/>
               </a:lnSpc>
@@ -16337,7 +16219,7 @@
           </a:bodyPr>
           <a:lstStyle/>
           <a:p>
-            <a:pPr algn="l" indent="0" marL="0">
+            <a:pPr marL="0" indent="0" algn="l">
               <a:lnSpc>
                 <a:spcPts val="1774"/>
               </a:lnSpc>
@@ -16381,7 +16263,7 @@
           </a:bodyPr>
           <a:lstStyle/>
           <a:p>
-            <a:pPr algn="l" indent="0" marL="0">
+            <a:pPr marL="0" indent="0" algn="l">
               <a:lnSpc>
                 <a:spcPts val="1612"/>
               </a:lnSpc>
@@ -16450,7 +16332,7 @@
           </a:bodyPr>
           <a:lstStyle/>
           <a:p>
-            <a:pPr algn="l" indent="0" marL="0">
+            <a:pPr marL="0" indent="0" algn="l">
               <a:lnSpc>
                 <a:spcPts val="1774"/>
               </a:lnSpc>
@@ -16494,7 +16376,7 @@
           </a:bodyPr>
           <a:lstStyle/>
           <a:p>
-            <a:pPr algn="l" indent="0" marL="0">
+            <a:pPr marL="0" indent="0" algn="l">
               <a:lnSpc>
                 <a:spcPts val="1622"/>
               </a:lnSpc>
@@ -16517,15 +16399,15 @@
       </p:sp>
       <p:pic>
         <p:nvPicPr>
-          <p:cNvPr id="31" name="Image 1" descr="arrow">    </p:cNvPr>
+          <p:cNvPr id="31" name="Image 1" descr="arrow"/>
           <p:cNvPicPr>
             <a:picLocks noChangeAspect="1"/>
           </p:cNvPicPr>
           <p:nvPr/>
         </p:nvPicPr>
         <p:blipFill>
-          <a:blip r:embed="rId2"/>
-          <a:srcRect l="0" r="0" t="-8333" b="-8333"/>
+          <a:blip r:embed="rId3"/>
+          <a:srcRect t="-8333" b="-8333"/>
           <a:stretch/>
         </p:blipFill>
         <p:spPr>
@@ -16561,7 +16443,7 @@
           </a:bodyPr>
           <a:lstStyle/>
           <a:p>
-            <a:pPr algn="l" indent="0" marL="0">
+            <a:pPr marL="0" indent="0" algn="l">
               <a:lnSpc>
                 <a:spcPts val="1680"/>
               </a:lnSpc>
@@ -16630,7 +16512,7 @@
           </a:bodyPr>
           <a:lstStyle/>
           <a:p>
-            <a:pPr algn="l" indent="0" marL="0">
+            <a:pPr marL="0" indent="0" algn="l">
               <a:lnSpc>
                 <a:spcPts val="1820"/>
               </a:lnSpc>
@@ -16674,7 +16556,7 @@
           </a:bodyPr>
           <a:lstStyle/>
           <a:p>
-            <a:pPr algn="l" indent="0" marL="0">
+            <a:pPr marL="0" indent="0" algn="l">
               <a:lnSpc>
                 <a:spcPts val="1680"/>
               </a:lnSpc>
@@ -16743,7 +16625,7 @@
           </a:bodyPr>
           <a:lstStyle/>
           <a:p>
-            <a:pPr algn="l" indent="0" marL="0">
+            <a:pPr marL="0" indent="0" algn="l">
               <a:lnSpc>
                 <a:spcPts val="1820"/>
               </a:lnSpc>
@@ -16787,7 +16669,7 @@
           </a:bodyPr>
           <a:lstStyle/>
           <a:p>
-            <a:pPr algn="l" indent="0" marL="0">
+            <a:pPr marL="0" indent="0" algn="l">
               <a:lnSpc>
                 <a:spcPts val="1680"/>
               </a:lnSpc>
@@ -16856,7 +16738,7 @@
           </a:bodyPr>
           <a:lstStyle/>
           <a:p>
-            <a:pPr algn="l" indent="0" marL="0">
+            <a:pPr marL="0" indent="0" algn="l">
               <a:lnSpc>
                 <a:spcPts val="1820"/>
               </a:lnSpc>
@@ -16900,7 +16782,7 @@
           </a:bodyPr>
           <a:lstStyle/>
           <a:p>
-            <a:pPr algn="l" indent="0" marL="0">
+            <a:pPr marL="0" indent="0" algn="l">
               <a:lnSpc>
                 <a:spcPts val="1680"/>
               </a:lnSpc>
@@ -16969,7 +16851,7 @@
           </a:bodyPr>
           <a:lstStyle/>
           <a:p>
-            <a:pPr algn="l" indent="0" marL="0">
+            <a:pPr marL="0" indent="0" algn="l">
               <a:lnSpc>
                 <a:spcPts val="1820"/>
               </a:lnSpc>
@@ -17013,7 +16895,7 @@
           </a:bodyPr>
           <a:lstStyle/>
           <a:p>
-            <a:pPr algn="l" indent="0" marL="0">
+            <a:pPr marL="0" indent="0" algn="l">
               <a:lnSpc>
                 <a:spcPts val="1680"/>
               </a:lnSpc>
@@ -17036,7 +16918,7 @@
       </p:sp>
       <p:pic>
         <p:nvPicPr>
-          <p:cNvPr id="45" name="Image 2" descr="arrow">    </p:cNvPr>
+          <p:cNvPr id="45" name="Image 2" descr="arrow"/>
           <p:cNvPicPr>
             <a:picLocks noChangeAspect="1"/>
           </p:cNvPicPr>
@@ -17044,7 +16926,7 @@
         </p:nvPicPr>
         <p:blipFill>
           <a:blip r:embed="rId3"/>
-          <a:srcRect l="0" r="0" t="-8333" b="-8333"/>
+          <a:srcRect t="-8333" b="-8333"/>
           <a:stretch/>
         </p:blipFill>
         <p:spPr>
@@ -17080,7 +16962,7 @@
           </a:bodyPr>
           <a:lstStyle/>
           <a:p>
-            <a:pPr algn="l" indent="0" marL="0">
+            <a:pPr marL="0" indent="0" algn="l">
               <a:lnSpc>
                 <a:spcPts val="1680"/>
               </a:lnSpc>
@@ -17149,7 +17031,7 @@
           </a:bodyPr>
           <a:lstStyle/>
           <a:p>
-            <a:pPr algn="l" indent="0" marL="0">
+            <a:pPr marL="0" indent="0" algn="l">
               <a:lnSpc>
                 <a:spcPts val="1820"/>
               </a:lnSpc>
@@ -17193,7 +17075,7 @@
           </a:bodyPr>
           <a:lstStyle/>
           <a:p>
-            <a:pPr algn="l" indent="0" marL="0">
+            <a:pPr marL="0" indent="0" algn="l">
               <a:lnSpc>
                 <a:spcPts val="1680"/>
               </a:lnSpc>
@@ -17262,7 +17144,7 @@
           </a:bodyPr>
           <a:lstStyle/>
           <a:p>
-            <a:pPr algn="l" indent="0" marL="0">
+            <a:pPr marL="0" indent="0" algn="l">
               <a:lnSpc>
                 <a:spcPts val="1820"/>
               </a:lnSpc>
@@ -17306,7 +17188,7 @@
           </a:bodyPr>
           <a:lstStyle/>
           <a:p>
-            <a:pPr algn="l" indent="0" marL="0">
+            <a:pPr marL="0" indent="0" algn="l">
               <a:lnSpc>
                 <a:spcPts val="1680"/>
               </a:lnSpc>
@@ -17375,7 +17257,7 @@
           </a:bodyPr>
           <a:lstStyle/>
           <a:p>
-            <a:pPr algn="l" indent="0" marL="0">
+            <a:pPr marL="0" indent="0" algn="l">
               <a:lnSpc>
                 <a:spcPts val="1820"/>
               </a:lnSpc>
@@ -17419,7 +17301,7 @@
           </a:bodyPr>
           <a:lstStyle/>
           <a:p>
-            <a:pPr algn="l" indent="0" marL="0">
+            <a:pPr marL="0" indent="0" algn="l">
               <a:lnSpc>
                 <a:spcPts val="1680"/>
               </a:lnSpc>
@@ -17488,7 +17370,7 @@
           </a:bodyPr>
           <a:lstStyle/>
           <a:p>
-            <a:pPr algn="l" indent="0" marL="0">
+            <a:pPr marL="0" indent="0" algn="l">
               <a:lnSpc>
                 <a:spcPts val="1820"/>
               </a:lnSpc>
@@ -17532,7 +17414,7 @@
           </a:bodyPr>
           <a:lstStyle/>
           <a:p>
-            <a:pPr algn="l" indent="0" marL="0">
+            <a:pPr marL="0" indent="0" algn="l">
               <a:lnSpc>
                 <a:spcPts val="1680"/>
               </a:lnSpc>
@@ -17576,7 +17458,7 @@
           </a:bodyPr>
           <a:lstStyle/>
           <a:p>
-            <a:pPr algn="l" indent="0" marL="0">
+            <a:pPr marL="0" indent="0" algn="l">
               <a:lnSpc>
                 <a:spcPts val="1820"/>
               </a:lnSpc>
@@ -17631,7 +17513,7 @@
           </a:bodyPr>
           <a:lstStyle/>
           <a:p>
-            <a:pPr algn="l" indent="0" marL="0">
+            <a:pPr marL="0" indent="0" algn="l">
               <a:lnSpc>
                 <a:spcPts val="1820"/>
               </a:lnSpc>
@@ -17686,7 +17568,7 @@
           </a:bodyPr>
           <a:lstStyle/>
           <a:p>
-            <a:pPr algn="l" indent="0" marL="0">
+            <a:pPr marL="0" indent="0" algn="l">
               <a:lnSpc>
                 <a:spcPts val="1680"/>
               </a:lnSpc>
@@ -17730,7 +17612,7 @@
           </a:bodyPr>
           <a:lstStyle/>
           <a:p>
-            <a:pPr algn="r" indent="0" marL="0">
+            <a:pPr marL="0" indent="0" algn="r">
               <a:lnSpc>
                 <a:spcPts val="1680"/>
               </a:lnSpc>
@@ -17767,6 +17649,7 @@
         <a:solidFill>
           <a:srgbClr val="1C1B19"/>
         </a:solidFill>
+        <a:effectLst/>
       </p:bgPr>
     </p:bg>
     <p:spTree>
@@ -17806,7 +17689,7 @@
           </a:bodyPr>
           <a:lstStyle/>
           <a:p>
-            <a:pPr algn="l" indent="0" marL="0">
+            <a:pPr marL="0" indent="0" algn="l">
               <a:lnSpc>
                 <a:spcPts val="1680"/>
               </a:lnSpc>
@@ -17850,14 +17733,14 @@
           </a:bodyPr>
           <a:lstStyle/>
           <a:p>
-            <a:pPr algn="l" indent="0" marL="0">
+            <a:pPr marL="0" indent="0" algn="l">
               <a:lnSpc>
                 <a:spcPts val="3300"/>
               </a:lnSpc>
               <a:buNone/>
             </a:pPr>
             <a:r>
-              <a:rPr lang="en-US" sz="3000" b="1" spc="-50" kern="0" dirty="0">
+              <a:rPr lang="en-US" sz="3000" b="1" kern="0" spc="-50" dirty="0">
                 <a:solidFill>
                   <a:srgbClr val="F5F2EA"/>
                 </a:solidFill>
@@ -17917,7 +17800,7 @@
           </a:bodyPr>
           <a:lstStyle/>
           <a:p>
-            <a:pPr algn="l" indent="0" marL="0">
+            <a:pPr marL="0" indent="0" algn="l">
               <a:lnSpc>
                 <a:spcPts val="1680"/>
               </a:lnSpc>
@@ -17940,15 +17823,15 @@
       </p:sp>
       <p:pic>
         <p:nvPicPr>
-          <p:cNvPr id="6" name="Image 0" descr="Arrows between pipeline stages">    </p:cNvPr>
+          <p:cNvPr id="6" name="Image 0" descr="Arrows between pipeline stages"/>
           <p:cNvPicPr>
             <a:picLocks noChangeAspect="1"/>
           </p:cNvPicPr>
           <p:nvPr/>
         </p:nvPicPr>
         <p:blipFill>
-          <a:blip r:embed="rId1"/>
-          <a:srcRect l="-50" r="-50" t="0" b="0"/>
+          <a:blip r:embed="rId3"/>
+          <a:srcRect l="-50" r="-50"/>
           <a:stretch/>
         </p:blipFill>
         <p:spPr>
@@ -18009,7 +17892,7 @@
           </a:bodyPr>
           <a:lstStyle/>
           <a:p>
-            <a:pPr algn="l" indent="0" marL="0">
+            <a:pPr marL="0" indent="0" algn="l">
               <a:lnSpc>
                 <a:spcPts val="1680"/>
               </a:lnSpc>
@@ -18053,7 +17936,7 @@
           </a:bodyPr>
           <a:lstStyle/>
           <a:p>
-            <a:pPr algn="l" indent="0" marL="0">
+            <a:pPr marL="0" indent="0" algn="l">
               <a:lnSpc>
                 <a:spcPts val="1495"/>
               </a:lnSpc>
@@ -18097,7 +17980,7 @@
           </a:bodyPr>
           <a:lstStyle/>
           <a:p>
-            <a:pPr algn="l" indent="0" marL="0">
+            <a:pPr marL="0" indent="0" algn="l">
               <a:lnSpc>
                 <a:spcPts val="1560"/>
               </a:lnSpc>
@@ -18166,7 +18049,7 @@
           </a:bodyPr>
           <a:lstStyle/>
           <a:p>
-            <a:pPr algn="l" indent="0" marL="0">
+            <a:pPr marL="0" indent="0" algn="l">
               <a:lnSpc>
                 <a:spcPts val="1680"/>
               </a:lnSpc>
@@ -18210,7 +18093,7 @@
           </a:bodyPr>
           <a:lstStyle/>
           <a:p>
-            <a:pPr algn="l" indent="0" marL="0">
+            <a:pPr marL="0" indent="0" algn="l">
               <a:lnSpc>
                 <a:spcPts val="1495"/>
               </a:lnSpc>
@@ -18254,7 +18137,7 @@
           </a:bodyPr>
           <a:lstStyle/>
           <a:p>
-            <a:pPr algn="l" indent="0" marL="0">
+            <a:pPr marL="0" indent="0" algn="l">
               <a:lnSpc>
                 <a:spcPts val="1560"/>
               </a:lnSpc>
@@ -18323,7 +18206,7 @@
           </a:bodyPr>
           <a:lstStyle/>
           <a:p>
-            <a:pPr algn="l" indent="0" marL="0">
+            <a:pPr marL="0" indent="0" algn="l">
               <a:lnSpc>
                 <a:spcPts val="1680"/>
               </a:lnSpc>
@@ -18367,7 +18250,7 @@
           </a:bodyPr>
           <a:lstStyle/>
           <a:p>
-            <a:pPr algn="l" indent="0" marL="0">
+            <a:pPr marL="0" indent="0" algn="l">
               <a:lnSpc>
                 <a:spcPts val="1495"/>
               </a:lnSpc>
@@ -18411,7 +18294,7 @@
           </a:bodyPr>
           <a:lstStyle/>
           <a:p>
-            <a:pPr algn="l" indent="0" marL="0">
+            <a:pPr marL="0" indent="0" algn="l">
               <a:lnSpc>
                 <a:spcPts val="1560"/>
               </a:lnSpc>
@@ -18480,7 +18363,7 @@
           </a:bodyPr>
           <a:lstStyle/>
           <a:p>
-            <a:pPr algn="l" indent="0" marL="0">
+            <a:pPr marL="0" indent="0" algn="l">
               <a:lnSpc>
                 <a:spcPts val="1680"/>
               </a:lnSpc>
@@ -18524,7 +18407,7 @@
           </a:bodyPr>
           <a:lstStyle/>
           <a:p>
-            <a:pPr algn="l" indent="0" marL="0">
+            <a:pPr marL="0" indent="0" algn="l">
               <a:lnSpc>
                 <a:spcPts val="1495"/>
               </a:lnSpc>
@@ -18568,7 +18451,7 @@
           </a:bodyPr>
           <a:lstStyle/>
           <a:p>
-            <a:pPr algn="l" indent="0" marL="0">
+            <a:pPr marL="0" indent="0" algn="l">
               <a:lnSpc>
                 <a:spcPts val="1560"/>
               </a:lnSpc>
@@ -18637,7 +18520,7 @@
           </a:bodyPr>
           <a:lstStyle/>
           <a:p>
-            <a:pPr algn="l" indent="0" marL="0">
+            <a:pPr marL="0" indent="0" algn="l">
               <a:lnSpc>
                 <a:spcPts val="1680"/>
               </a:lnSpc>
@@ -18681,7 +18564,7 @@
           </a:bodyPr>
           <a:lstStyle/>
           <a:p>
-            <a:pPr algn="l" indent="0" marL="0">
+            <a:pPr marL="0" indent="0" algn="l">
               <a:lnSpc>
                 <a:spcPts val="1495"/>
               </a:lnSpc>
@@ -18725,7 +18608,7 @@
           </a:bodyPr>
           <a:lstStyle/>
           <a:p>
-            <a:pPr algn="l" indent="0" marL="0">
+            <a:pPr marL="0" indent="0" algn="l">
               <a:lnSpc>
                 <a:spcPts val="1560"/>
               </a:lnSpc>
@@ -18794,7 +18677,7 @@
           </a:bodyPr>
           <a:lstStyle/>
           <a:p>
-            <a:pPr algn="l" indent="0" marL="0">
+            <a:pPr marL="0" indent="0" algn="l">
               <a:lnSpc>
                 <a:spcPts val="1680"/>
               </a:lnSpc>
@@ -18838,7 +18721,7 @@
           </a:bodyPr>
           <a:lstStyle/>
           <a:p>
-            <a:pPr algn="l" indent="0" marL="0">
+            <a:pPr marL="0" indent="0" algn="l">
               <a:lnSpc>
                 <a:spcPts val="1495"/>
               </a:lnSpc>
@@ -18882,7 +18765,7 @@
           </a:bodyPr>
           <a:lstStyle/>
           <a:p>
-            <a:pPr algn="l" indent="0" marL="0">
+            <a:pPr marL="0" indent="0" algn="l">
               <a:lnSpc>
                 <a:spcPts val="1560"/>
               </a:lnSpc>
@@ -18951,7 +18834,7 @@
           </a:bodyPr>
           <a:lstStyle/>
           <a:p>
-            <a:pPr algn="l" indent="0" marL="0">
+            <a:pPr marL="0" indent="0" algn="l">
               <a:lnSpc>
                 <a:spcPts val="1680"/>
               </a:lnSpc>
@@ -18995,7 +18878,7 @@
           </a:bodyPr>
           <a:lstStyle/>
           <a:p>
-            <a:pPr algn="l" indent="0" marL="0">
+            <a:pPr marL="0" indent="0" algn="l">
               <a:lnSpc>
                 <a:spcPts val="1495"/>
               </a:lnSpc>
@@ -19039,7 +18922,7 @@
           </a:bodyPr>
           <a:lstStyle/>
           <a:p>
-            <a:pPr algn="l" indent="0" marL="0">
+            <a:pPr marL="0" indent="0" algn="l">
               <a:lnSpc>
                 <a:spcPts val="1560"/>
               </a:lnSpc>
@@ -19062,15 +18945,15 @@
       </p:sp>
       <p:pic>
         <p:nvPicPr>
-          <p:cNvPr id="35" name="Image 1" descr="Feedback loop from adaptation back to the risk model">    </p:cNvPr>
+          <p:cNvPr id="35" name="Image 1" descr="Feedback loop from adaptation back to the risk model"/>
           <p:cNvPicPr>
             <a:picLocks noChangeAspect="1"/>
           </p:cNvPicPr>
           <p:nvPr/>
         </p:nvPicPr>
         <p:blipFill>
-          <a:blip r:embed="rId2"/>
-          <a:srcRect l="0" r="0" t="-235" b="-235"/>
+          <a:blip r:embed="rId4"/>
+          <a:srcRect t="-235" b="-235"/>
           <a:stretch/>
         </p:blipFill>
         <p:spPr>
@@ -19106,7 +18989,7 @@
           </a:bodyPr>
           <a:lstStyle/>
           <a:p>
-            <a:pPr algn="l" indent="0" marL="0">
+            <a:pPr marL="0" indent="0" algn="l">
               <a:lnSpc>
                 <a:spcPts val="1680"/>
               </a:lnSpc>
@@ -19150,7 +19033,7 @@
           </a:bodyPr>
           <a:lstStyle/>
           <a:p>
-            <a:pPr algn="l" indent="0" marL="0">
+            <a:pPr marL="0" indent="0" algn="l">
               <a:lnSpc>
                 <a:spcPts val="2240"/>
               </a:lnSpc>
@@ -19194,7 +19077,7 @@
           </a:bodyPr>
           <a:lstStyle/>
           <a:p>
-            <a:pPr algn="l" indent="0" marL="0">
+            <a:pPr marL="0" indent="0" algn="l">
               <a:lnSpc>
                 <a:spcPts val="1680"/>
               </a:lnSpc>
@@ -19238,7 +19121,7 @@
           </a:bodyPr>
           <a:lstStyle/>
           <a:p>
-            <a:pPr algn="r" indent="0" marL="0">
+            <a:pPr marL="0" indent="0" algn="r">
               <a:lnSpc>
                 <a:spcPts val="1680"/>
               </a:lnSpc>
@@ -19275,6 +19158,7 @@
         <a:solidFill>
           <a:srgbClr val="1C1B19"/>
         </a:solidFill>
+        <a:effectLst/>
       </p:bgPr>
     </p:bg>
     <p:spTree>
@@ -19314,7 +19198,7 @@
           </a:bodyPr>
           <a:lstStyle/>
           <a:p>
-            <a:pPr algn="l" indent="0" marL="0">
+            <a:pPr marL="0" indent="0" algn="l">
               <a:lnSpc>
                 <a:spcPts val="1680"/>
               </a:lnSpc>
@@ -19358,14 +19242,14 @@
           </a:bodyPr>
           <a:lstStyle/>
           <a:p>
-            <a:pPr algn="l" indent="0" marL="0">
+            <a:pPr marL="0" indent="0" algn="l">
               <a:lnSpc>
                 <a:spcPts val="3300"/>
               </a:lnSpc>
               <a:buNone/>
             </a:pPr>
             <a:r>
-              <a:rPr lang="en-US" sz="3000" b="1" spc="-50" kern="0" dirty="0">
+              <a:rPr lang="en-US" sz="3000" b="1" kern="0" spc="-50" dirty="0">
                 <a:solidFill>
                   <a:srgbClr val="F5F2EA"/>
                 </a:solidFill>
@@ -19402,7 +19286,7 @@
           </a:bodyPr>
           <a:lstStyle/>
           <a:p>
-            <a:pPr algn="l" marL="228600" indent="-182880">
+            <a:pPr marL="228600" indent="-182880" algn="l">
               <a:lnSpc>
                 <a:spcPts val="2025"/>
               </a:lnSpc>
@@ -19434,7 +19318,7 @@
             <a:endParaRPr lang="en-US" sz="1500" dirty="0"/>
           </a:p>
           <a:p>
-            <a:pPr algn="l" marL="228600" indent="-182880">
+            <a:pPr marL="228600" indent="-182880" algn="l">
               <a:lnSpc>
                 <a:spcPts val="2025"/>
               </a:lnSpc>
@@ -19466,7 +19350,7 @@
             <a:endParaRPr lang="en-US" sz="1500" dirty="0"/>
           </a:p>
           <a:p>
-            <a:pPr algn="l" marL="228600" indent="-182880">
+            <a:pPr marL="228600" indent="-182880" algn="l">
               <a:lnSpc>
                 <a:spcPts val="2025"/>
               </a:lnSpc>
@@ -19498,7 +19382,7 @@
             <a:endParaRPr lang="en-US" sz="1500" dirty="0"/>
           </a:p>
           <a:p>
-            <a:pPr algn="l" marL="228600" indent="-182880">
+            <a:pPr marL="228600" indent="-182880" algn="l">
               <a:lnSpc>
                 <a:spcPts val="2025"/>
               </a:lnSpc>
@@ -19574,7 +19458,7 @@
           </a:bodyPr>
           <a:lstStyle/>
           <a:p>
-            <a:pPr algn="l" indent="0" marL="0">
+            <a:pPr marL="0" indent="0" algn="l">
               <a:lnSpc>
                 <a:spcPts val="1680"/>
               </a:lnSpc>
@@ -19638,7 +19522,7 @@
           </a:bodyPr>
           <a:lstStyle/>
           <a:p>
-            <a:pPr algn="l" indent="0" marL="0">
+            <a:pPr marL="0" indent="0" algn="l">
               <a:lnSpc>
                 <a:spcPts val="1680"/>
               </a:lnSpc>
@@ -19702,7 +19586,7 @@
           </a:bodyPr>
           <a:lstStyle/>
           <a:p>
-            <a:pPr algn="l" indent="0" marL="0">
+            <a:pPr marL="0" indent="0" algn="l">
               <a:lnSpc>
                 <a:spcPts val="1680"/>
               </a:lnSpc>
@@ -19766,7 +19650,7 @@
           </a:bodyPr>
           <a:lstStyle/>
           <a:p>
-            <a:pPr algn="l" indent="0" marL="0">
+            <a:pPr marL="0" indent="0" algn="l">
               <a:lnSpc>
                 <a:spcPts val="1680"/>
               </a:lnSpc>
@@ -19810,7 +19694,7 @@
           </a:bodyPr>
           <a:lstStyle/>
           <a:p>
-            <a:pPr algn="l" indent="0" marL="0">
+            <a:pPr marL="0" indent="0" algn="l">
               <a:lnSpc>
                 <a:spcPts val="1620"/>
               </a:lnSpc>
@@ -19833,15 +19717,15 @@
       </p:sp>
       <p:pic>
         <p:nvPicPr>
-          <p:cNvPr id="14" name="Image 0" descr="Prototype flood-risk layer by grid cell around Vijayawada and the Krishna delta">    </p:cNvPr>
+          <p:cNvPr id="14" name="Image 0" descr="Prototype flood-risk layer by grid cell around Vijayawada and the Krishna delta"/>
           <p:cNvPicPr>
             <a:picLocks noChangeAspect="1"/>
           </p:cNvPicPr>
           <p:nvPr/>
         </p:nvPicPr>
         <p:blipFill>
-          <a:blip r:embed="rId1"/>
-          <a:srcRect l="0" r="0" t="0" b="0"/>
+          <a:blip r:embed="rId3"/>
+          <a:srcRect/>
           <a:stretch/>
         </p:blipFill>
         <p:spPr>
@@ -19877,7 +19761,7 @@
           </a:bodyPr>
           <a:lstStyle/>
           <a:p>
-            <a:pPr algn="l" indent="0" marL="0">
+            <a:pPr marL="0" indent="0" algn="l">
               <a:lnSpc>
                 <a:spcPts val="1440"/>
               </a:lnSpc>
@@ -19921,7 +19805,7 @@
           </a:bodyPr>
           <a:lstStyle/>
           <a:p>
-            <a:pPr algn="l" indent="0" marL="0">
+            <a:pPr marL="0" indent="0" algn="l">
               <a:lnSpc>
                 <a:spcPts val="1440"/>
               </a:lnSpc>
@@ -19965,7 +19849,7 @@
           </a:bodyPr>
           <a:lstStyle/>
           <a:p>
-            <a:pPr algn="l" indent="0" marL="0">
+            <a:pPr marL="0" indent="0" algn="l">
               <a:lnSpc>
                 <a:spcPts val="1680"/>
               </a:lnSpc>
@@ -20009,7 +19893,7 @@
           </a:bodyPr>
           <a:lstStyle/>
           <a:p>
-            <a:pPr algn="r" indent="0" marL="0">
+            <a:pPr marL="0" indent="0" algn="r">
               <a:lnSpc>
                 <a:spcPts val="1680"/>
               </a:lnSpc>
@@ -20046,6 +19930,7 @@
         <a:solidFill>
           <a:srgbClr val="1C1B19"/>
         </a:solidFill>
+        <a:effectLst/>
       </p:bgPr>
     </p:bg>
     <p:spTree>
@@ -20085,7 +19970,7 @@
           </a:bodyPr>
           <a:lstStyle/>
           <a:p>
-            <a:pPr algn="l" indent="0" marL="0">
+            <a:pPr marL="0" indent="0" algn="l">
               <a:lnSpc>
                 <a:spcPts val="1680"/>
               </a:lnSpc>
@@ -20129,14 +20014,14 @@
           </a:bodyPr>
           <a:lstStyle/>
           <a:p>
-            <a:pPr algn="l" indent="0" marL="0">
+            <a:pPr marL="0" indent="0" algn="l">
               <a:lnSpc>
                 <a:spcPts val="3300"/>
               </a:lnSpc>
               <a:buNone/>
             </a:pPr>
             <a:r>
-              <a:rPr lang="en-US" sz="3000" b="1" spc="-50" kern="0" dirty="0">
+              <a:rPr lang="en-US" sz="3000" b="1" kern="0" spc="-50" dirty="0">
                 <a:solidFill>
                   <a:srgbClr val="F5F2EA"/>
                 </a:solidFill>
@@ -20198,7 +20083,7 @@
           </a:bodyPr>
           <a:lstStyle/>
           <a:p>
-            <a:pPr algn="l" indent="0" marL="0">
+            <a:pPr marL="0" indent="0" algn="l">
               <a:lnSpc>
                 <a:spcPts val="2250"/>
               </a:lnSpc>
@@ -20218,7 +20103,7 @@
             <a:endParaRPr lang="en-US" sz="1500" dirty="0"/>
           </a:p>
           <a:p>
-            <a:pPr algn="l" indent="0" marL="0">
+            <a:pPr marL="0" indent="0" algn="l">
               <a:lnSpc>
                 <a:spcPts val="2250"/>
               </a:lnSpc>
@@ -20238,7 +20123,7 @@
             <a:endParaRPr lang="en-US" sz="1500" dirty="0"/>
           </a:p>
           <a:p>
-            <a:pPr algn="l" indent="0" marL="0">
+            <a:pPr marL="0" indent="0" algn="l">
               <a:lnSpc>
                 <a:spcPts val="2250"/>
               </a:lnSpc>
@@ -20282,7 +20167,7 @@
           </a:bodyPr>
           <a:lstStyle/>
           <a:p>
-            <a:pPr algn="l" indent="0" marL="0">
+            <a:pPr marL="0" indent="0" algn="l">
               <a:lnSpc>
                 <a:spcPts val="1680"/>
               </a:lnSpc>
@@ -20326,7 +20211,7 @@
           </a:bodyPr>
           <a:lstStyle/>
           <a:p>
-            <a:pPr algn="l" marL="228600" indent="-182880">
+            <a:pPr marL="228600" indent="-182880" algn="l">
               <a:lnSpc>
                 <a:spcPts val="2025"/>
               </a:lnSpc>
@@ -20358,7 +20243,7 @@
             <a:endParaRPr lang="en-US" sz="1500" dirty="0"/>
           </a:p>
           <a:p>
-            <a:pPr algn="l" marL="228600" indent="-182880">
+            <a:pPr marL="228600" indent="-182880" algn="l">
               <a:lnSpc>
                 <a:spcPts val="2025"/>
               </a:lnSpc>
@@ -20390,7 +20275,7 @@
             <a:endParaRPr lang="en-US" sz="1500" dirty="0"/>
           </a:p>
           <a:p>
-            <a:pPr algn="l" marL="228600" indent="-182880">
+            <a:pPr marL="228600" indent="-182880" algn="l">
               <a:lnSpc>
                 <a:spcPts val="2025"/>
               </a:lnSpc>
@@ -20422,7 +20307,7 @@
             <a:endParaRPr lang="en-US" sz="1500" dirty="0"/>
           </a:p>
           <a:p>
-            <a:pPr algn="l" marL="228600" indent="-182880">
+            <a:pPr marL="228600" indent="-182880" algn="l">
               <a:lnSpc>
                 <a:spcPts val="2025"/>
               </a:lnSpc>
@@ -20446,15 +20331,15 @@
       </p:sp>
       <p:pic>
         <p:nvPicPr>
-          <p:cNvPr id="8" name="Image 0" descr="12 by 12 QUBO matrix of the western subproblem: orange diagonal rewards, grey off-diagonal overlap plus cardinality penalties">    </p:cNvPr>
+          <p:cNvPr id="8" name="Image 0" descr="12 by 12 QUBO matrix of the western subproblem: orange diagonal rewards, grey off-diagonal overlap plus cardinality penalties"/>
           <p:cNvPicPr>
             <a:picLocks noChangeAspect="1"/>
           </p:cNvPicPr>
           <p:nvPr/>
         </p:nvPicPr>
         <p:blipFill>
-          <a:blip r:embed="rId1"/>
-          <a:srcRect l="0" r="0" t="0" b="0"/>
+          <a:blip r:embed="rId3"/>
+          <a:srcRect/>
           <a:stretch/>
         </p:blipFill>
         <p:spPr>
@@ -20490,7 +20375,7 @@
           </a:bodyPr>
           <a:lstStyle/>
           <a:p>
-            <a:pPr algn="l" indent="0" marL="0">
+            <a:pPr marL="0" indent="0" algn="l">
               <a:lnSpc>
                 <a:spcPts val="1680"/>
               </a:lnSpc>
@@ -20554,7 +20439,7 @@
           </a:bodyPr>
           <a:lstStyle/>
           <a:p>
-            <a:pPr algn="l" indent="0" marL="0">
+            <a:pPr marL="0" indent="0" algn="l">
               <a:lnSpc>
                 <a:spcPts val="1680"/>
               </a:lnSpc>
@@ -20618,7 +20503,7 @@
           </a:bodyPr>
           <a:lstStyle/>
           <a:p>
-            <a:pPr algn="l" indent="0" marL="0">
+            <a:pPr marL="0" indent="0" algn="l">
               <a:lnSpc>
                 <a:spcPts val="1680"/>
               </a:lnSpc>
@@ -20662,7 +20547,7 @@
           </a:bodyPr>
           <a:lstStyle/>
           <a:p>
-            <a:pPr algn="l" indent="0" marL="0">
+            <a:pPr marL="0" indent="0" algn="l">
               <a:lnSpc>
                 <a:spcPts val="1680"/>
               </a:lnSpc>
@@ -20706,7 +20591,7 @@
           </a:bodyPr>
           <a:lstStyle/>
           <a:p>
-            <a:pPr algn="r" indent="0" marL="0">
+            <a:pPr marL="0" indent="0" algn="r">
               <a:lnSpc>
                 <a:spcPts val="1680"/>
               </a:lnSpc>
@@ -20743,6 +20628,7 @@
         <a:solidFill>
           <a:srgbClr val="1C1B19"/>
         </a:solidFill>
+        <a:effectLst/>
       </p:bgPr>
     </p:bg>
     <p:spTree>
@@ -20782,7 +20668,7 @@
           </a:bodyPr>
           <a:lstStyle/>
           <a:p>
-            <a:pPr algn="l" indent="0" marL="0">
+            <a:pPr marL="0" indent="0" algn="l">
               <a:lnSpc>
                 <a:spcPts val="1523"/>
               </a:lnSpc>
@@ -20826,14 +20712,14 @@
           </a:bodyPr>
           <a:lstStyle/>
           <a:p>
-            <a:pPr algn="l" indent="0" marL="0">
+            <a:pPr marL="0" indent="0" algn="l">
               <a:lnSpc>
                 <a:spcPts val="2970"/>
               </a:lnSpc>
               <a:buNone/>
             </a:pPr>
             <a:r>
-              <a:rPr lang="en-US" sz="2700" b="1" spc="-50" kern="0" dirty="0">
+              <a:rPr lang="en-US" sz="2700" b="1" kern="0" spc="-50" dirty="0">
                 <a:solidFill>
                   <a:srgbClr val="F5F2EA"/>
                 </a:solidFill>
@@ -20849,15 +20735,15 @@
       </p:sp>
       <p:pic>
         <p:nvPicPr>
-          <p:cNvPr id="4" name="Image 0" descr="QAOA parameterized circuit: Hadamards, cost layer of ZZ and Z rotations, mixer of X rotations, repeated p times, measurement feeding a classical optimiser">    </p:cNvPr>
+          <p:cNvPr id="4" name="Image 0" descr="QAOA parameterized circuit: Hadamards, cost layer of ZZ and Z rotations, mixer of X rotations, repeated p times, measurement feeding a classical optimiser"/>
           <p:cNvPicPr>
             <a:picLocks noChangeAspect="1"/>
           </p:cNvPicPr>
           <p:nvPr/>
         </p:nvPicPr>
         <p:blipFill>
-          <a:blip r:embed="rId1"/>
-          <a:srcRect l="-43" r="-43" t="0" b="0"/>
+          <a:blip r:embed="rId3"/>
+          <a:srcRect l="-43" r="-43"/>
           <a:stretch/>
         </p:blipFill>
         <p:spPr>
@@ -20893,7 +20779,7 @@
           </a:bodyPr>
           <a:lstStyle/>
           <a:p>
-            <a:pPr algn="l" indent="0" marL="0">
+            <a:pPr marL="0" indent="0" algn="l">
               <a:lnSpc>
                 <a:spcPts val="1680"/>
               </a:lnSpc>
@@ -20937,7 +20823,7 @@
           </a:bodyPr>
           <a:lstStyle/>
           <a:p>
-            <a:pPr algn="l" indent="0" marL="0">
+            <a:pPr marL="0" indent="0" algn="l">
               <a:lnSpc>
                 <a:spcPts val="1680"/>
               </a:lnSpc>
@@ -20981,7 +20867,7 @@
           </a:bodyPr>
           <a:lstStyle/>
           <a:p>
-            <a:pPr algn="l" indent="0" marL="0">
+            <a:pPr marL="0" indent="0" algn="l">
               <a:lnSpc>
                 <a:spcPts val="1680"/>
               </a:lnSpc>
@@ -21025,7 +20911,7 @@
           </a:bodyPr>
           <a:lstStyle/>
           <a:p>
-            <a:pPr algn="l" indent="0" marL="0">
+            <a:pPr marL="0" indent="0" algn="l">
               <a:lnSpc>
                 <a:spcPts val="1680"/>
               </a:lnSpc>
@@ -21069,7 +20955,7 @@
           </a:bodyPr>
           <a:lstStyle/>
           <a:p>
-            <a:pPr algn="l" indent="0" marL="0">
+            <a:pPr marL="0" indent="0" algn="l">
               <a:lnSpc>
                 <a:spcPts val="1680"/>
               </a:lnSpc>
@@ -21113,7 +20999,7 @@
           </a:bodyPr>
           <a:lstStyle/>
           <a:p>
-            <a:pPr algn="l" indent="0" marL="0">
+            <a:pPr marL="0" indent="0" algn="l">
               <a:lnSpc>
                 <a:spcPts val="1680"/>
               </a:lnSpc>
@@ -21157,7 +21043,7 @@
           </a:bodyPr>
           <a:lstStyle/>
           <a:p>
-            <a:pPr algn="l" indent="0" marL="0">
+            <a:pPr marL="0" indent="0" algn="l">
               <a:lnSpc>
                 <a:spcPts val="1680"/>
               </a:lnSpc>
@@ -21201,7 +21087,7 @@
           </a:bodyPr>
           <a:lstStyle/>
           <a:p>
-            <a:pPr algn="l" indent="0" marL="0">
+            <a:pPr marL="0" indent="0" algn="l">
               <a:lnSpc>
                 <a:spcPts val="1680"/>
               </a:lnSpc>
@@ -21245,7 +21131,7 @@
           </a:bodyPr>
           <a:lstStyle/>
           <a:p>
-            <a:pPr algn="l" indent="0" marL="0">
+            <a:pPr marL="0" indent="0" algn="l">
               <a:lnSpc>
                 <a:spcPts val="1680"/>
               </a:lnSpc>
@@ -21289,7 +21175,7 @@
           </a:bodyPr>
           <a:lstStyle/>
           <a:p>
-            <a:pPr algn="l" indent="0" marL="0">
+            <a:pPr marL="0" indent="0" algn="l">
               <a:lnSpc>
                 <a:spcPts val="1960"/>
               </a:lnSpc>
@@ -21333,7 +21219,7 @@
           </a:bodyPr>
           <a:lstStyle/>
           <a:p>
-            <a:pPr algn="l" indent="0" marL="0">
+            <a:pPr marL="0" indent="0" algn="l">
               <a:lnSpc>
                 <a:spcPts val="1620"/>
               </a:lnSpc>
@@ -21377,7 +21263,7 @@
           </a:bodyPr>
           <a:lstStyle/>
           <a:p>
-            <a:pPr algn="l" indent="0" marL="0">
+            <a:pPr marL="0" indent="0" algn="l">
               <a:lnSpc>
                 <a:spcPts val="1680"/>
               </a:lnSpc>
@@ -21421,7 +21307,7 @@
           </a:bodyPr>
           <a:lstStyle/>
           <a:p>
-            <a:pPr algn="l" indent="0" marL="0">
+            <a:pPr marL="0" indent="0" algn="l">
               <a:lnSpc>
                 <a:spcPts val="1672"/>
               </a:lnSpc>
@@ -21461,11 +21347,11 @@
         </p:spPr>
         <p:txBody>
           <a:bodyPr wrap="square" lIns="0" tIns="0" rIns="0" bIns="0" rtlCol="0" anchor="t">
-            <a:normAutofit/>
-          </a:bodyPr>
-          <a:lstStyle/>
-          <a:p>
-            <a:pPr algn="l" indent="0" marL="0">
+            <a:normAutofit fontScale="62500" lnSpcReduction="20000"/>
+          </a:bodyPr>
+          <a:lstStyle/>
+          <a:p>
+            <a:pPr marL="0" indent="0" algn="l">
               <a:lnSpc>
                 <a:spcPts val="1960"/>
               </a:lnSpc>
@@ -21516,11 +21402,11 @@
         </p:spPr>
         <p:txBody>
           <a:bodyPr wrap="square" lIns="0" tIns="0" rIns="0" bIns="0" rtlCol="0" anchor="t">
-            <a:normAutofit/>
-          </a:bodyPr>
-          <a:lstStyle/>
-          <a:p>
-            <a:pPr algn="l" indent="0" marL="0">
+            <a:normAutofit fontScale="85000" lnSpcReduction="10000"/>
+          </a:bodyPr>
+          <a:lstStyle/>
+          <a:p>
+            <a:pPr marL="0" indent="0" algn="l">
               <a:lnSpc>
                 <a:spcPts val="1960"/>
               </a:lnSpc>
@@ -21571,11 +21457,11 @@
         </p:spPr>
         <p:txBody>
           <a:bodyPr wrap="square" lIns="0" tIns="0" rIns="0" bIns="0" rtlCol="0" anchor="t">
-            <a:normAutofit/>
-          </a:bodyPr>
-          <a:lstStyle/>
-          <a:p>
-            <a:pPr algn="l" indent="0" marL="0">
+            <a:normAutofit fontScale="62500" lnSpcReduction="20000"/>
+          </a:bodyPr>
+          <a:lstStyle/>
+          <a:p>
+            <a:pPr marL="0" indent="0" algn="l">
               <a:lnSpc>
                 <a:spcPts val="1960"/>
               </a:lnSpc>
@@ -21630,7 +21516,7 @@
           </a:bodyPr>
           <a:lstStyle/>
           <a:p>
-            <a:pPr algn="l" indent="0" marL="0">
+            <a:pPr marL="0" indent="0" algn="l">
               <a:lnSpc>
                 <a:spcPts val="1680"/>
               </a:lnSpc>
@@ -21674,7 +21560,7 @@
           </a:bodyPr>
           <a:lstStyle/>
           <a:p>
-            <a:pPr algn="r" indent="0" marL="0">
+            <a:pPr marL="0" indent="0" algn="r">
               <a:lnSpc>
                 <a:spcPts val="1680"/>
               </a:lnSpc>
@@ -21996,4 +21882,299 @@
     </a:ext>
   </a:extLst>
 </a:theme>
+</file>
+
+<file path=ppt/theme/theme2.xml><?xml version="1.0" encoding="utf-8"?>
+<a:theme xmlns:a="http://schemas.openxmlformats.org/drawingml/2006/main" name="Office Theme">
+  <a:themeElements>
+    <a:clrScheme name="Office">
+      <a:dk1>
+        <a:sysClr val="windowText" lastClr="000000"/>
+      </a:dk1>
+      <a:lt1>
+        <a:sysClr val="window" lastClr="FFFFFF"/>
+      </a:lt1>
+      <a:dk2>
+        <a:srgbClr val="44546A"/>
+      </a:dk2>
+      <a:lt2>
+        <a:srgbClr val="E7E6E6"/>
+      </a:lt2>
+      <a:accent1>
+        <a:srgbClr val="4472C4"/>
+      </a:accent1>
+      <a:accent2>
+        <a:srgbClr val="ED7D31"/>
+      </a:accent2>
+      <a:accent3>
+        <a:srgbClr val="A5A5A5"/>
+      </a:accent3>
+      <a:accent4>
+        <a:srgbClr val="FFC000"/>
+      </a:accent4>
+      <a:accent5>
+        <a:srgbClr val="5B9BD5"/>
+      </a:accent5>
+      <a:accent6>
+        <a:srgbClr val="70AD47"/>
+      </a:accent6>
+      <a:hlink>
+        <a:srgbClr val="0563C1"/>
+      </a:hlink>
+      <a:folHlink>
+        <a:srgbClr val="954F72"/>
+      </a:folHlink>
+    </a:clrScheme>
+    <a:fontScheme name="Office">
+      <a:majorFont>
+        <a:latin typeface="Calibri Light" panose="020F0302020204030204"/>
+        <a:ea typeface=""/>
+        <a:cs typeface=""/>
+        <a:font script="Jpan" typeface="游ゴシック Light"/>
+        <a:font script="Hang" typeface="맑은 고딕"/>
+        <a:font script="Hans" typeface="等线 Light"/>
+        <a:font script="Hant" typeface="新細明體"/>
+        <a:font script="Arab" typeface="Times New Roman"/>
+        <a:font script="Hebr" typeface="Times New Roman"/>
+        <a:font script="Thai" typeface="Angsana New"/>
+        <a:font script="Ethi" typeface="Nyala"/>
+        <a:font script="Beng" typeface="Vrinda"/>
+        <a:font script="Gujr" typeface="Shruti"/>
+        <a:font script="Khmr" typeface="MoolBoran"/>
+        <a:font script="Knda" typeface="Tunga"/>
+        <a:font script="Guru" typeface="Raavi"/>
+        <a:font script="Cans" typeface="Euphemia"/>
+        <a:font script="Cher" typeface="Plantagenet Cherokee"/>
+        <a:font script="Yiii" typeface="Microsoft Yi Baiti"/>
+        <a:font script="Tibt" typeface="Microsoft Himalaya"/>
+        <a:font script="Thaa" typeface="MV Boli"/>
+        <a:font script="Deva" typeface="Mangal"/>
+        <a:font script="Telu" typeface="Gautami"/>
+        <a:font script="Taml" typeface="Latha"/>
+        <a:font script="Syrc" typeface="Estrangelo Edessa"/>
+        <a:font script="Orya" typeface="Kalinga"/>
+        <a:font script="Mlym" typeface="Kartika"/>
+        <a:font script="Laoo" typeface="DokChampa"/>
+        <a:font script="Sinh" typeface="Iskoola Pota"/>
+        <a:font script="Mong" typeface="Mongolian Baiti"/>
+        <a:font script="Viet" typeface="Times New Roman"/>
+        <a:font script="Uigh" typeface="Microsoft Uighur"/>
+        <a:font script="Geor" typeface="Sylfaen"/>
+        <a:font script="Armn" typeface="Arial"/>
+        <a:font script="Bugi" typeface="Leelawadee UI"/>
+        <a:font script="Bopo" typeface="Microsoft JhengHei"/>
+        <a:font script="Java" typeface="Javanese Text"/>
+        <a:font script="Lisu" typeface="Segoe UI"/>
+        <a:font script="Mymr" typeface="Myanmar Text"/>
+        <a:font script="Nkoo" typeface="Ebrima"/>
+        <a:font script="Olck" typeface="Nirmala UI"/>
+        <a:font script="Osma" typeface="Ebrima"/>
+        <a:font script="Phag" typeface="Phagspa"/>
+        <a:font script="Syrn" typeface="Estrangelo Edessa"/>
+        <a:font script="Syrj" typeface="Estrangelo Edessa"/>
+        <a:font script="Syre" typeface="Estrangelo Edessa"/>
+        <a:font script="Sora" typeface="Nirmala UI"/>
+        <a:font script="Tale" typeface="Microsoft Tai Le"/>
+        <a:font script="Talu" typeface="Microsoft New Tai Lue"/>
+        <a:font script="Tfng" typeface="Ebrima"/>
+      </a:majorFont>
+      <a:minorFont>
+        <a:latin typeface="Calibri" panose="020F0502020204030204"/>
+        <a:ea typeface=""/>
+        <a:cs typeface=""/>
+        <a:font script="Jpan" typeface="游ゴシック"/>
+        <a:font script="Hang" typeface="맑은 고딕"/>
+        <a:font script="Hans" typeface="等线"/>
+        <a:font script="Hant" typeface="新細明體"/>
+        <a:font script="Arab" typeface="Arial"/>
+        <a:font script="Hebr" typeface="Arial"/>
+        <a:font script="Thai" typeface="Cordia New"/>
+        <a:font script="Ethi" typeface="Nyala"/>
+        <a:font script="Beng" typeface="Vrinda"/>
+        <a:font script="Gujr" typeface="Shruti"/>
+        <a:font script="Khmr" typeface="DaunPenh"/>
+        <a:font script="Knda" typeface="Tunga"/>
+        <a:font script="Guru" typeface="Raavi"/>
+        <a:font script="Cans" typeface="Euphemia"/>
+        <a:font script="Cher" typeface="Plantagenet Cherokee"/>
+        <a:font script="Yiii" typeface="Microsoft Yi Baiti"/>
+        <a:font script="Tibt" typeface="Microsoft Himalaya"/>
+        <a:font script="Thaa" typeface="MV Boli"/>
+        <a:font script="Deva" typeface="Mangal"/>
+        <a:font script="Telu" typeface="Gautami"/>
+        <a:font script="Taml" typeface="Latha"/>
+        <a:font script="Syrc" typeface="Estrangelo Edessa"/>
+        <a:font script="Orya" typeface="Kalinga"/>
+        <a:font script="Mlym" typeface="Kartika"/>
+        <a:font script="Laoo" typeface="DokChampa"/>
+        <a:font script="Sinh" typeface="Iskoola Pota"/>
+        <a:font script="Mong" typeface="Mongolian Baiti"/>
+        <a:font script="Viet" typeface="Arial"/>
+        <a:font script="Uigh" typeface="Microsoft Uighur"/>
+        <a:font script="Geor" typeface="Sylfaen"/>
+        <a:font script="Armn" typeface="Arial"/>
+        <a:font script="Bugi" typeface="Leelawadee UI"/>
+        <a:font script="Bopo" typeface="Microsoft JhengHei"/>
+        <a:font script="Java" typeface="Javanese Text"/>
+        <a:font script="Lisu" typeface="Segoe UI"/>
+        <a:font script="Mymr" typeface="Myanmar Text"/>
+        <a:font script="Nkoo" typeface="Ebrima"/>
+        <a:font script="Olck" typeface="Nirmala UI"/>
+        <a:font script="Osma" typeface="Ebrima"/>
+        <a:font script="Phag" typeface="Phagspa"/>
+        <a:font script="Syrn" typeface="Estrangelo Edessa"/>
+        <a:font script="Syrj" typeface="Estrangelo Edessa"/>
+        <a:font script="Syre" typeface="Estrangelo Edessa"/>
+        <a:font script="Sora" typeface="Nirmala UI"/>
+        <a:font script="Tale" typeface="Microsoft Tai Le"/>
+        <a:font script="Talu" typeface="Microsoft New Tai Lue"/>
+        <a:font script="Tfng" typeface="Ebrima"/>
+      </a:minorFont>
+    </a:fontScheme>
+    <a:fmtScheme name="Office">
+      <a:fillStyleLst>
+        <a:solidFill>
+          <a:schemeClr val="phClr"/>
+        </a:solidFill>
+        <a:gradFill rotWithShape="1">
+          <a:gsLst>
+            <a:gs pos="0">
+              <a:schemeClr val="phClr">
+                <a:lumMod val="110000"/>
+                <a:satMod val="105000"/>
+                <a:tint val="67000"/>
+              </a:schemeClr>
+            </a:gs>
+            <a:gs pos="50000">
+              <a:schemeClr val="phClr">
+                <a:lumMod val="105000"/>
+                <a:satMod val="103000"/>
+                <a:tint val="73000"/>
+              </a:schemeClr>
+            </a:gs>
+            <a:gs pos="100000">
+              <a:schemeClr val="phClr">
+                <a:lumMod val="105000"/>
+                <a:satMod val="109000"/>
+                <a:tint val="81000"/>
+              </a:schemeClr>
+            </a:gs>
+          </a:gsLst>
+          <a:lin ang="5400000" scaled="0"/>
+        </a:gradFill>
+        <a:gradFill rotWithShape="1">
+          <a:gsLst>
+            <a:gs pos="0">
+              <a:schemeClr val="phClr">
+                <a:satMod val="103000"/>
+                <a:lumMod val="102000"/>
+                <a:tint val="94000"/>
+              </a:schemeClr>
+            </a:gs>
+            <a:gs pos="50000">
+              <a:schemeClr val="phClr">
+                <a:satMod val="110000"/>
+                <a:lumMod val="100000"/>
+                <a:shade val="100000"/>
+              </a:schemeClr>
+            </a:gs>
+            <a:gs pos="100000">
+              <a:schemeClr val="phClr">
+                <a:lumMod val="99000"/>
+                <a:satMod val="120000"/>
+                <a:shade val="78000"/>
+              </a:schemeClr>
+            </a:gs>
+          </a:gsLst>
+          <a:lin ang="5400000" scaled="0"/>
+        </a:gradFill>
+      </a:fillStyleLst>
+      <a:lnStyleLst>
+        <a:ln w="6350" cap="flat" cmpd="sng" algn="ctr">
+          <a:solidFill>
+            <a:schemeClr val="phClr"/>
+          </a:solidFill>
+          <a:prstDash val="solid"/>
+          <a:miter lim="800000"/>
+        </a:ln>
+        <a:ln w="12700" cap="flat" cmpd="sng" algn="ctr">
+          <a:solidFill>
+            <a:schemeClr val="phClr"/>
+          </a:solidFill>
+          <a:prstDash val="solid"/>
+          <a:miter lim="800000"/>
+        </a:ln>
+        <a:ln w="19050" cap="flat" cmpd="sng" algn="ctr">
+          <a:solidFill>
+            <a:schemeClr val="phClr"/>
+          </a:solidFill>
+          <a:prstDash val="solid"/>
+          <a:miter lim="800000"/>
+        </a:ln>
+      </a:lnStyleLst>
+      <a:effectStyleLst>
+        <a:effectStyle>
+          <a:effectLst/>
+        </a:effectStyle>
+        <a:effectStyle>
+          <a:effectLst/>
+        </a:effectStyle>
+        <a:effectStyle>
+          <a:effectLst>
+            <a:outerShdw blurRad="57150" dist="19050" dir="5400000" algn="ctr" rotWithShape="0">
+              <a:srgbClr val="000000">
+                <a:alpha val="63000"/>
+              </a:srgbClr>
+            </a:outerShdw>
+          </a:effectLst>
+        </a:effectStyle>
+      </a:effectStyleLst>
+      <a:bgFillStyleLst>
+        <a:solidFill>
+          <a:schemeClr val="phClr"/>
+        </a:solidFill>
+        <a:solidFill>
+          <a:schemeClr val="phClr">
+            <a:tint val="95000"/>
+            <a:satMod val="170000"/>
+          </a:schemeClr>
+        </a:solidFill>
+        <a:gradFill rotWithShape="1">
+          <a:gsLst>
+            <a:gs pos="0">
+              <a:schemeClr val="phClr">
+                <a:tint val="93000"/>
+                <a:satMod val="150000"/>
+                <a:shade val="98000"/>
+                <a:lumMod val="102000"/>
+              </a:schemeClr>
+            </a:gs>
+            <a:gs pos="50000">
+              <a:schemeClr val="phClr">
+                <a:tint val="98000"/>
+                <a:satMod val="130000"/>
+                <a:shade val="90000"/>
+                <a:lumMod val="103000"/>
+              </a:schemeClr>
+            </a:gs>
+            <a:gs pos="100000">
+              <a:schemeClr val="phClr">
+                <a:shade val="63000"/>
+                <a:satMod val="120000"/>
+              </a:schemeClr>
+            </a:gs>
+          </a:gsLst>
+          <a:lin ang="5400000" scaled="0"/>
+        </a:gradFill>
+      </a:bgFillStyleLst>
+    </a:fmtScheme>
+  </a:themeElements>
+  <a:objectDefaults/>
+  <a:extraClrSchemeLst/>
+  <a:extLst>
+    <a:ext uri="{05A4C25C-085E-4340-85A3-A5531E510DB2}">
+      <thm15:themeFamily xmlns:thm15="http://schemas.microsoft.com/office/thememl/2012/main" name="Office Theme" id="{62F939B6-93AF-4DB8-9C6B-D6C7DFDC589F}" vid="{4A3C46E8-61CC-4603-A589-7422A47A8E4A}"/>
+    </a:ext>
+  </a:extLst>
+</a:theme>
 </file>